--- a/presentation/Team_Phoenix_SIH26177_Official_Deck.pptx
+++ b/presentation/Team_Phoenix_SIH26177_Official_Deck.pptx
@@ -3108,7 +3108,7 @@
             <a:avLst/>
           </a:prstGeom>
           <a:solidFill>
-            <a:srgbClr val="0F172A"/>
+            <a:srgbClr val="F8FAFC"/>
           </a:solidFill>
           <a:ln>
             <a:noFill/>
@@ -3144,8 +3144,8 @@
         </p:nvSpPr>
         <p:spPr>
           <a:xfrm>
-            <a:off x="914400" y="1097280"/>
-            <a:ext cx="10332720" cy="2926080"/>
+            <a:off x="914400" y="548640"/>
+            <a:ext cx="10362895" cy="731520"/>
           </a:xfrm>
           <a:prstGeom prst="rect">
             <a:avLst/>
@@ -3153,50 +3153,32 @@
           <a:noFill/>
         </p:spPr>
         <p:txBody>
-          <a:bodyPr wrap="square">
+          <a:bodyPr wrap="none">
             <a:spAutoFit/>
           </a:bodyPr>
           <a:lstStyle/>
           <a:p>
-            <a:pPr>
-              <a:spcAft>
-                <a:spcPts val="1200"/>
-              </a:spcAft>
-              <a:defRPr sz="1300" b="1">
-                <a:solidFill>
-                  <a:srgbClr val="F59E0B"/>
-                </a:solidFill>
-              </a:defRPr>
-            </a:pPr>
-            <a:r>
-              <a:t>SMART INDIA HACKATHON 2026 | HARDWARE EDITION</a:t>
-            </a:r>
-          </a:p>
-          <a:p>
-            <a:pPr>
-              <a:spcAft>
-                <a:spcPts val="800"/>
-              </a:spcAft>
-              <a:defRPr sz="3200" b="1">
-                <a:solidFill>
-                  <a:srgbClr val="FFFFFF"/>
-                </a:solidFill>
-              </a:defRPr>
-            </a:pPr>
-            <a:r>
-              <a:t>PROJECT PHOENIX: AUTONOMOUS SEARCH &amp; RESCUE UAV</a:t>
-            </a:r>
-          </a:p>
-          <a:p>
-            <a:pPr>
-              <a:defRPr sz="1600">
-                <a:solidFill>
-                  <a:srgbClr val="CBD5E1"/>
-                </a:solidFill>
-              </a:defRPr>
-            </a:pPr>
-            <a:r>
-              <a:t>Deployable Multi-Spectral Edge-AI Drone for Rapid Victim Localization &amp; Hazard Reconnaissance in Communication-Denied Disasters</a:t>
+            <a:pPr algn="ctr">
+              <a:defRPr sz="2600" b="1">
+                <a:solidFill>
+                  <a:srgbClr val="0F172A"/>
+                </a:solidFill>
+              </a:defRPr>
+            </a:pPr>
+            <a:r>
+              <a:t>SMART INDIA HACKATHON 2026</a:t>
+            </a:r>
+          </a:p>
+          <a:p>
+            <a:pPr algn="ctr">
+              <a:defRPr sz="1100" b="1">
+                <a:solidFill>
+                  <a:srgbClr val="D97706"/>
+                </a:solidFill>
+              </a:defRPr>
+            </a:pPr>
+            <a:r>
+              <a:t>HARDWARE EDITION  |  MINISTRY OF EDUCATION &amp; QUALCOMM INC.</a:t>
             </a:r>
           </a:p>
         </p:txBody>
@@ -3209,18 +3191,18 @@
         </p:nvSpPr>
         <p:spPr>
           <a:xfrm>
-            <a:off x="914400" y="4114800"/>
-            <a:ext cx="10332720" cy="2011680"/>
+            <a:off x="1371600" y="1645920"/>
+            <a:ext cx="9448495" cy="4389120"/>
           </a:xfrm>
           <a:prstGeom prst="roundRect">
             <a:avLst/>
           </a:prstGeom>
           <a:solidFill>
-            <a:srgbClr val="1E293B"/>
+            <a:srgbClr val="FFFFFF"/>
           </a:solidFill>
-          <a:ln w="19050">
+          <a:ln w="15240">
             <a:solidFill>
-              <a:srgbClr val="F59E0B"/>
+              <a:srgbClr val="E2E8F0"/>
             </a:solidFill>
           </a:ln>
         </p:spPr>
@@ -3254,8 +3236,8 @@
         </p:nvSpPr>
         <p:spPr>
           <a:xfrm>
-            <a:off x="1188720" y="4297680"/>
-            <a:ext cx="9784080" cy="1645920"/>
+            <a:off x="1737360" y="1920240"/>
+            <a:ext cx="5486400" cy="3840480"/>
           </a:xfrm>
           <a:prstGeom prst="rect">
             <a:avLst/>
@@ -3270,43 +3252,282 @@
           <a:p>
             <a:pPr>
               <a:spcAft>
-                <a:spcPts val="600"/>
+                <a:spcPts val="800"/>
               </a:spcAft>
-              <a:defRPr sz="1400" b="1">
-                <a:solidFill>
-                  <a:srgbClr val="FFFFFF"/>
-                </a:solidFill>
-              </a:defRPr>
-            </a:pPr>
-            <a:r>
-              <a:t>• Problem Statement ID: SIH26177  |  Theme: Robotics and Drones  |  Category: Hardware</a:t>
+            </a:pPr>
+            <a:r>
+              <a:rPr b="1" sz="1150">
+                <a:solidFill>
+                  <a:srgbClr val="0F172A"/>
+                </a:solidFill>
+              </a:rPr>
+              <a:t>• Problem Statement ID: </a:t>
+            </a:r>
+            <a:r>
+              <a:rPr sz="1100">
+                <a:solidFill>
+                  <a:srgbClr val="1E293B"/>
+                </a:solidFill>
+              </a:rPr>
+              <a:t>SIH26177</a:t>
             </a:r>
           </a:p>
           <a:p>
             <a:pPr>
               <a:spcAft>
-                <a:spcPts val="600"/>
+                <a:spcPts val="800"/>
               </a:spcAft>
-              <a:defRPr sz="1400" b="1">
-                <a:solidFill>
-                  <a:srgbClr val="F59E0B"/>
-                </a:solidFill>
-              </a:defRPr>
-            </a:pPr>
-            <a:r>
-              <a:t>• Sponsoring Organization: Qualcomm Inc.</a:t>
+            </a:pPr>
+            <a:r>
+              <a:rPr b="1" sz="1150">
+                <a:solidFill>
+                  <a:srgbClr val="0F172A"/>
+                </a:solidFill>
+              </a:rPr>
+              <a:t>• Problem Statement Title: </a:t>
+            </a:r>
+            <a:r>
+              <a:rPr sz="1100">
+                <a:solidFill>
+                  <a:srgbClr val="1E293B"/>
+                </a:solidFill>
+              </a:rPr>
+              <a:t>A deployable AI-powered autonomous drone that aids search-and-rescue operations by detecting people and hazards, thereby improving responder safety and reducing victim discovery time.</a:t>
             </a:r>
           </a:p>
           <a:p>
             <a:pPr>
-              <a:defRPr sz="1400">
-                <a:solidFill>
-                  <a:srgbClr val="E2E8F0"/>
-                </a:solidFill>
-              </a:defRPr>
-            </a:pPr>
-            <a:r>
-              <a:t>• Team Name: Team Phoenix  |  Domain: CSE + AI &amp; Data Science + Cyber Security (2nd Year Undergraduates)</a:t>
+              <a:spcAft>
+                <a:spcPts val="800"/>
+              </a:spcAft>
+            </a:pPr>
+            <a:r>
+              <a:rPr b="1" sz="1150">
+                <a:solidFill>
+                  <a:srgbClr val="0F172A"/>
+                </a:solidFill>
+              </a:rPr>
+              <a:t>• Sponsoring Organization: </a:t>
+            </a:r>
+            <a:r>
+              <a:rPr sz="1100">
+                <a:solidFill>
+                  <a:srgbClr val="1E293B"/>
+                </a:solidFill>
+              </a:rPr>
+              <a:t>Qualcomm Inc.</a:t>
+            </a:r>
+          </a:p>
+          <a:p>
+            <a:pPr>
+              <a:spcAft>
+                <a:spcPts val="800"/>
+              </a:spcAft>
+            </a:pPr>
+            <a:r>
+              <a:rPr b="1" sz="1150">
+                <a:solidFill>
+                  <a:srgbClr val="0F172A"/>
+                </a:solidFill>
+              </a:rPr>
+              <a:t>• Theme: </a:t>
+            </a:r>
+            <a:r>
+              <a:rPr sz="1100">
+                <a:solidFill>
+                  <a:srgbClr val="1E293B"/>
+                </a:solidFill>
+              </a:rPr>
+              <a:t>Robotics and Drones</a:t>
+            </a:r>
+          </a:p>
+          <a:p>
+            <a:pPr>
+              <a:spcAft>
+                <a:spcPts val="800"/>
+              </a:spcAft>
+            </a:pPr>
+            <a:r>
+              <a:rPr b="1" sz="1150">
+                <a:solidFill>
+                  <a:srgbClr val="0F172A"/>
+                </a:solidFill>
+              </a:rPr>
+              <a:t>• Category: </a:t>
+            </a:r>
+            <a:r>
+              <a:rPr sz="1100">
+                <a:solidFill>
+                  <a:srgbClr val="1E293B"/>
+                </a:solidFill>
+              </a:rPr>
+              <a:t>Hardware</a:t>
+            </a:r>
+          </a:p>
+          <a:p>
+            <a:pPr>
+              <a:spcAft>
+                <a:spcPts val="800"/>
+              </a:spcAft>
+            </a:pPr>
+            <a:r>
+              <a:rPr b="1" sz="1150">
+                <a:solidFill>
+                  <a:srgbClr val="0F172A"/>
+                </a:solidFill>
+              </a:rPr>
+              <a:t>• Team Name: </a:t>
+            </a:r>
+            <a:r>
+              <a:rPr sz="1100">
+                <a:solidFill>
+                  <a:srgbClr val="1E293B"/>
+                </a:solidFill>
+              </a:rPr>
+              <a:t>Team Phoenix</a:t>
+            </a:r>
+          </a:p>
+          <a:p>
+            <a:pPr>
+              <a:spcAft>
+                <a:spcPts val="800"/>
+              </a:spcAft>
+            </a:pPr>
+            <a:r>
+              <a:rPr b="1" sz="1150">
+                <a:solidFill>
+                  <a:srgbClr val="0F172A"/>
+                </a:solidFill>
+              </a:rPr>
+              <a:t>• Team Specialization: </a:t>
+            </a:r>
+            <a:r>
+              <a:rPr sz="1100">
+                <a:solidFill>
+                  <a:srgbClr val="1E293B"/>
+                </a:solidFill>
+              </a:rPr>
+              <a:t>CSE + AI &amp; Data Science + Cyber Security (2nd Year Undergrads)</a:t>
+            </a:r>
+          </a:p>
+        </p:txBody>
+      </p:sp>
+      <p:sp>
+        <p:nvSpPr>
+          <p:cNvPr id="6" name="Rounded Rectangle 5"/>
+          <p:cNvSpPr/>
+          <p:nvPr/>
+        </p:nvSpPr>
+        <p:spPr>
+          <a:xfrm>
+            <a:off x="7498079" y="1920240"/>
+            <a:ext cx="2926080" cy="3840480"/>
+          </a:xfrm>
+          <a:prstGeom prst="roundRect">
+            <a:avLst/>
+          </a:prstGeom>
+          <a:solidFill>
+            <a:srgbClr val="F0F9FF"/>
+          </a:solidFill>
+          <a:ln w="15240">
+            <a:solidFill>
+              <a:srgbClr val="BAE6FD"/>
+            </a:solidFill>
+          </a:ln>
+        </p:spPr>
+        <p:style>
+          <a:lnRef idx="1">
+            <a:schemeClr val="accent1"/>
+          </a:lnRef>
+          <a:fillRef idx="3">
+            <a:schemeClr val="accent1"/>
+          </a:fillRef>
+          <a:effectRef idx="2">
+            <a:schemeClr val="accent1"/>
+          </a:effectRef>
+          <a:fontRef idx="minor">
+            <a:schemeClr val="lt1"/>
+          </a:fontRef>
+        </p:style>
+        <p:txBody>
+          <a:bodyPr rtlCol="0" anchor="ctr"/>
+          <a:lstStyle/>
+          <a:p>
+            <a:pPr algn="ctr"/>
+          </a:p>
+        </p:txBody>
+      </p:sp>
+      <p:sp>
+        <p:nvSpPr>
+          <p:cNvPr id="7" name="TextBox 6"/>
+          <p:cNvSpPr txBox="1"/>
+          <p:nvPr/>
+        </p:nvSpPr>
+        <p:spPr>
+          <a:xfrm>
+            <a:off x="7680960" y="2194560"/>
+            <a:ext cx="2560320" cy="3291840"/>
+          </a:xfrm>
+          <a:prstGeom prst="rect">
+            <a:avLst/>
+          </a:prstGeom>
+          <a:noFill/>
+        </p:spPr>
+        <p:txBody>
+          <a:bodyPr wrap="square">
+            <a:spAutoFit/>
+          </a:bodyPr>
+          <a:lstStyle/>
+          <a:p>
+            <a:pPr algn="ctr">
+              <a:spcAft>
+                <a:spcPts val="1200"/>
+              </a:spcAft>
+              <a:defRPr sz="1800" b="1">
+                <a:solidFill>
+                  <a:srgbClr val="0284C7"/>
+                </a:solidFill>
+              </a:defRPr>
+            </a:pPr>
+            <a:r>
+              <a:t>PROJECT PHOENIX</a:t>
+            </a:r>
+            <a:br/>
+            <a:r>
+              <a:t>SAR UAV</a:t>
+            </a:r>
+          </a:p>
+          <a:p>
+            <a:pPr>
+              <a:defRPr sz="1050">
+                <a:solidFill>
+                  <a:srgbClr val="1E293B"/>
+                </a:solidFill>
+              </a:defRPr>
+            </a:pPr>
+            <a:r>
+              <a:t>Dual-Brain Edge-AI Scout for Zero-Infrastructure Disaster Reconnaissance</a:t>
+            </a:r>
+            <a:br/>
+            <a:br/>
+            <a:r>
+              <a:t>✓ Qualcomm Dragonwing QRB2210</a:t>
+            </a:r>
+            <a:br/>
+            <a:r>
+              <a:t>✓ STM32U5 Zephyr RTOS Flight</a:t>
+            </a:r>
+            <a:br/>
+            <a:r>
+              <a:t>✓ Dual RGB + Thermal Fusion</a:t>
+            </a:r>
+            <a:br/>
+            <a:r>
+              <a:t>✓ 3-5 km LoRa Telemetry</a:t>
+            </a:r>
+            <a:br/>
+            <a:r>
+              <a:t>✓ Tait-Bryan Ray-Casting GPS</a:t>
             </a:r>
           </a:p>
         </p:txBody>
@@ -3331,75 +3552,23 @@
       <p:grpSpPr/>
       <p:sp>
         <p:nvSpPr>
-          <p:cNvPr id="2" name="TextBox 1"/>
-          <p:cNvSpPr txBox="1"/>
-          <p:nvPr/>
-        </p:nvSpPr>
-        <p:spPr>
-          <a:xfrm>
-            <a:off x="731520" y="365760"/>
-            <a:ext cx="10698480" cy="1005840"/>
+          <p:cNvPr id="2" name="Rectangle 1"/>
+          <p:cNvSpPr/>
+          <p:nvPr/>
+        </p:nvSpPr>
+        <p:spPr>
+          <a:xfrm>
+            <a:off x="0" y="0"/>
+            <a:ext cx="12191695" cy="6858000"/>
           </a:xfrm>
           <a:prstGeom prst="rect">
             <a:avLst/>
           </a:prstGeom>
-          <a:noFill/>
-        </p:spPr>
-        <p:txBody>
-          <a:bodyPr wrap="square" lIns="0" tIns="0" rIns="0" bIns="0">
-            <a:spAutoFit/>
-          </a:bodyPr>
-          <a:lstStyle/>
-          <a:p>
-            <a:pPr>
-              <a:spcAft>
-                <a:spcPts val="400"/>
-              </a:spcAft>
-              <a:defRPr sz="1000" b="1">
-                <a:solidFill>
-                  <a:srgbClr val="F59E0B"/>
-                </a:solidFill>
-              </a:defRPr>
-            </a:pPr>
-            <a:r>
-              <a:t>SMART INDIA HACKATHON 2026 | PROBLEM STATEMENT ID: SIH26177</a:t>
-            </a:r>
-          </a:p>
-          <a:p>
-            <a:pPr>
-              <a:defRPr sz="2200" b="1">
-                <a:solidFill>
-                  <a:srgbClr val="0F172A"/>
-                </a:solidFill>
-              </a:defRPr>
-            </a:pPr>
-            <a:r>
-              <a:t>The Critical Need: Disaster Reconnaissance in the 'Golden 72 Hours'</a:t>
-            </a:r>
-          </a:p>
-        </p:txBody>
-      </p:sp>
-      <p:sp>
-        <p:nvSpPr>
-          <p:cNvPr id="3" name="Rectangle 2"/>
-          <p:cNvSpPr/>
-          <p:nvPr/>
-        </p:nvSpPr>
-        <p:spPr>
-          <a:xfrm>
-            <a:off x="731520" y="1325880"/>
-            <a:ext cx="10698480" cy="36576"/>
-          </a:xfrm>
-          <a:prstGeom prst="rect">
-            <a:avLst/>
-          </a:prstGeom>
           <a:solidFill>
-            <a:srgbClr val="F59E0B"/>
+            <a:srgbClr val="F8FAFC"/>
           </a:solidFill>
           <a:ln>
-            <a:solidFill>
-              <a:srgbClr val="F59E0B"/>
-            </a:solidFill>
+            <a:noFill/>
           </a:ln>
         </p:spPr>
         <p:style>
@@ -3426,14 +3595,14 @@
       </p:sp>
       <p:sp>
         <p:nvSpPr>
-          <p:cNvPr id="4" name="Rounded Rectangle 3"/>
+          <p:cNvPr id="3" name="Rounded Rectangle 2"/>
           <p:cNvSpPr/>
           <p:nvPr/>
         </p:nvSpPr>
         <p:spPr>
           <a:xfrm>
-            <a:off x="731520" y="1554480"/>
-            <a:ext cx="3328416" cy="4754880"/>
+            <a:off x="548640" y="320040"/>
+            <a:ext cx="1645920" cy="502920"/>
           </a:xfrm>
           <a:prstGeom prst="roundRect">
             <a:avLst/>
@@ -3441,7 +3610,7 @@
           <a:solidFill>
             <a:srgbClr val="FFFFFF"/>
           </a:solidFill>
-          <a:ln w="19050">
+          <a:ln w="12700">
             <a:solidFill>
               <a:srgbClr val="E2E8F0"/>
             </a:solidFill>
@@ -3465,20 +3634,29 @@
           <a:bodyPr rtlCol="0" anchor="ctr"/>
           <a:lstStyle/>
           <a:p>
-            <a:pPr algn="ctr"/>
-          </a:p>
-        </p:txBody>
-      </p:sp>
-      <p:sp>
-        <p:nvSpPr>
-          <p:cNvPr id="5" name="TextBox 4"/>
+            <a:pPr algn="ctr">
+              <a:defRPr sz="1300" b="1">
+                <a:solidFill>
+                  <a:srgbClr val="0F172A"/>
+                </a:solidFill>
+              </a:defRPr>
+            </a:pPr>
+            <a:r>
+              <a:t>PHOENIX</a:t>
+            </a:r>
+          </a:p>
+        </p:txBody>
+      </p:sp>
+      <p:sp>
+        <p:nvSpPr>
+          <p:cNvPr id="4" name="TextBox 3"/>
           <p:cNvSpPr txBox="1"/>
           <p:nvPr/>
         </p:nvSpPr>
         <p:spPr>
           <a:xfrm>
-            <a:off x="914400" y="1737360"/>
-            <a:ext cx="2962656" cy="4389120"/>
+            <a:off x="2377440" y="292608"/>
+            <a:ext cx="7315200" cy="594360"/>
           </a:xfrm>
           <a:prstGeom prst="rect">
             <a:avLst/>
@@ -3491,65 +3669,77 @@
           </a:bodyPr>
           <a:lstStyle/>
           <a:p>
-            <a:pPr>
-              <a:spcAft>
-                <a:spcPts val="1000"/>
-              </a:spcAft>
-              <a:defRPr sz="1600" b="1">
-                <a:solidFill>
-                  <a:srgbClr val="2563EB"/>
-                </a:solidFill>
-              </a:defRPr>
-            </a:pPr>
-            <a:r>
-              <a:t>1. Communication Blackout</a:t>
-            </a:r>
-          </a:p>
-          <a:p>
-            <a:pPr>
-              <a:defRPr sz="1300">
-                <a:solidFill>
-                  <a:srgbClr val="1E293B"/>
-                </a:solidFill>
-              </a:defRPr>
-            </a:pPr>
-            <a:r>
-              <a:t>• Severe Disconnection: Earthquakes, landslides (e.g. Wayanad 2024), and floods instantly sever 4G/5G mobile towers and electrical grids.</a:t>
-            </a:r>
-            <a:br/>
-            <a:br/>
-            <a:r>
-              <a:t>• Cloud-AI Fails: Standard consumer drones rely on cellular telemetry or cloud processing, rendering them completely blind and inoperable in the disaster epicentre.</a:t>
-            </a:r>
-            <a:br/>
-            <a:br/>
-            <a:r>
-              <a:t>• First Responder Disconnect: Ground crews operate with zero real-time situational awareness.</a:t>
-            </a:r>
-          </a:p>
-        </p:txBody>
-      </p:sp>
-      <p:sp>
-        <p:nvSpPr>
-          <p:cNvPr id="6" name="Rounded Rectangle 5"/>
+            <a:pPr algn="ctr">
+              <a:defRPr sz="2000" b="1">
+                <a:solidFill>
+                  <a:srgbClr val="0F172A"/>
+                </a:solidFill>
+              </a:defRPr>
+            </a:pPr>
+            <a:r>
+              <a:t>Disaster Reconnaissance &amp; Emergency Survivor Triage</a:t>
+            </a:r>
+          </a:p>
+        </p:txBody>
+      </p:sp>
+      <p:sp>
+        <p:nvSpPr>
+          <p:cNvPr id="5" name="TextBox 4"/>
+          <p:cNvSpPr txBox="1"/>
+          <p:nvPr/>
+        </p:nvSpPr>
+        <p:spPr>
+          <a:xfrm>
+            <a:off x="9875520" y="274320"/>
+            <a:ext cx="1828800" cy="594360"/>
+          </a:xfrm>
+          <a:prstGeom prst="rect">
+            <a:avLst/>
+          </a:prstGeom>
+          <a:noFill/>
+        </p:spPr>
+        <p:txBody>
+          <a:bodyPr wrap="none">
+            <a:spAutoFit/>
+          </a:bodyPr>
+          <a:lstStyle/>
+          <a:p>
+            <a:pPr algn="r">
+              <a:defRPr sz="950" b="1">
+                <a:solidFill>
+                  <a:srgbClr val="0F172A"/>
+                </a:solidFill>
+              </a:defRPr>
+            </a:pPr>
+            <a:r>
+              <a:t>SMART INDIA</a:t>
+            </a:r>
+            <a:br/>
+            <a:r>
+              <a:t>HACKATHON 2026</a:t>
+            </a:r>
+          </a:p>
+        </p:txBody>
+      </p:sp>
+      <p:sp>
+        <p:nvSpPr>
+          <p:cNvPr id="6" name="Rectangle 5"/>
           <p:cNvSpPr/>
           <p:nvPr/>
         </p:nvSpPr>
         <p:spPr>
           <a:xfrm>
-            <a:off x="4425696" y="1554480"/>
-            <a:ext cx="3328416" cy="4754880"/>
-          </a:xfrm>
-          <a:prstGeom prst="roundRect">
+            <a:off x="0" y="6537960"/>
+            <a:ext cx="12191695" cy="320040"/>
+          </a:xfrm>
+          <a:prstGeom prst="rect">
             <a:avLst/>
           </a:prstGeom>
           <a:solidFill>
-            <a:srgbClr val="FFFFFF"/>
+            <a:srgbClr val="0F172A"/>
           </a:solidFill>
-          <a:ln w="19050">
-            <a:solidFill>
-              <a:srgbClr val="E2E8F0"/>
-            </a:solidFill>
+          <a:ln>
+            <a:noFill/>
           </a:ln>
         </p:spPr>
         <p:style>
@@ -3570,80 +3760,29 @@
           <a:bodyPr rtlCol="0" anchor="ctr"/>
           <a:lstStyle/>
           <a:p>
-            <a:pPr algn="ctr"/>
-          </a:p>
-        </p:txBody>
-      </p:sp>
-      <p:sp>
-        <p:nvSpPr>
-          <p:cNvPr id="7" name="TextBox 6"/>
-          <p:cNvSpPr txBox="1"/>
-          <p:nvPr/>
-        </p:nvSpPr>
-        <p:spPr>
-          <a:xfrm>
-            <a:off x="4608576" y="1737360"/>
-            <a:ext cx="2962656" cy="4389120"/>
-          </a:xfrm>
-          <a:prstGeom prst="rect">
-            <a:avLst/>
-          </a:prstGeom>
-          <a:noFill/>
-        </p:spPr>
-        <p:txBody>
-          <a:bodyPr wrap="square">
-            <a:spAutoFit/>
-          </a:bodyPr>
-          <a:lstStyle/>
-          <a:p>
-            <a:pPr>
-              <a:spcAft>
-                <a:spcPts val="1000"/>
-              </a:spcAft>
-              <a:defRPr sz="1600" b="1">
-                <a:solidFill>
-                  <a:srgbClr val="2563EB"/>
-                </a:solidFill>
-              </a:defRPr>
-            </a:pPr>
-            <a:r>
-              <a:t>2. Environmental Occlusion</a:t>
-            </a:r>
-          </a:p>
-          <a:p>
-            <a:pPr>
-              <a:defRPr sz="1300">
-                <a:solidFill>
-                  <a:srgbClr val="1E293B"/>
-                </a:solidFill>
-              </a:defRPr>
-            </a:pPr>
-            <a:r>
-              <a:t>• Slush, Smoke &amp; Darkness: Debris, thick rain clouds, and smoke plumes camouflage survivors from ordinary visual (RGB) aerial cameras.</a:t>
-            </a:r>
-            <a:br/>
-            <a:br/>
-            <a:r>
-              <a:t>• Night Stoppage: Search operations are traditionally halted at sunset when optical visibility drops to zero, wasting crucial survival hours.</a:t>
-            </a:r>
-            <a:br/>
-            <a:br/>
-            <a:r>
-              <a:t>• The Rubble Trap: Survivors trapped under light sheet debris remain invisible to human spotters.</a:t>
-            </a:r>
-          </a:p>
-        </p:txBody>
-      </p:sp>
-      <p:sp>
-        <p:nvSpPr>
-          <p:cNvPr id="8" name="Rounded Rectangle 7"/>
+            <a:pPr algn="ctr">
+              <a:defRPr sz="900">
+                <a:solidFill>
+                  <a:srgbClr val="FFFFFF"/>
+                </a:solidFill>
+              </a:defRPr>
+            </a:pPr>
+            <a:r>
+              <a:t>PROJECT PHOENIX: Autonomous Multi-Spectral Edge-AI UAV  |  SIH26177 (Qualcomm Inc.)                                                                   Slide 2</a:t>
+            </a:r>
+          </a:p>
+        </p:txBody>
+      </p:sp>
+      <p:sp>
+        <p:nvSpPr>
+          <p:cNvPr id="7" name="Rounded Rectangle 6"/>
           <p:cNvSpPr/>
           <p:nvPr/>
         </p:nvSpPr>
         <p:spPr>
           <a:xfrm>
-            <a:off x="8119872" y="1554480"/>
-            <a:ext cx="3328416" cy="4754880"/>
+            <a:off x="548640" y="1005840"/>
+            <a:ext cx="5394960" cy="2286000"/>
           </a:xfrm>
           <a:prstGeom prst="roundRect">
             <a:avLst/>
@@ -3651,9 +3790,9 @@
           <a:solidFill>
             <a:srgbClr val="FFFFFF"/>
           </a:solidFill>
-          <a:ln w="19050">
+          <a:ln w="15240">
             <a:solidFill>
-              <a:srgbClr val="E2E8F0"/>
+              <a:srgbClr val="FECDD3"/>
             </a:solidFill>
           </a:ln>
         </p:spPr>
@@ -3681,14 +3820,68 @@
       </p:sp>
       <p:sp>
         <p:nvSpPr>
+          <p:cNvPr id="8" name="Rounded Rectangle 7"/>
+          <p:cNvSpPr/>
+          <p:nvPr/>
+        </p:nvSpPr>
+        <p:spPr>
+          <a:xfrm>
+            <a:off x="731520" y="1143000"/>
+            <a:ext cx="1645920" cy="292608"/>
+          </a:xfrm>
+          <a:prstGeom prst="roundRect">
+            <a:avLst/>
+          </a:prstGeom>
+          <a:solidFill>
+            <a:srgbClr val="FFF1F2"/>
+          </a:solidFill>
+          <a:ln w="12700">
+            <a:solidFill>
+              <a:srgbClr val="FECDD3"/>
+            </a:solidFill>
+          </a:ln>
+        </p:spPr>
+        <p:style>
+          <a:lnRef idx="1">
+            <a:schemeClr val="accent1"/>
+          </a:lnRef>
+          <a:fillRef idx="3">
+            <a:schemeClr val="accent1"/>
+          </a:fillRef>
+          <a:effectRef idx="2">
+            <a:schemeClr val="accent1"/>
+          </a:effectRef>
+          <a:fontRef idx="minor">
+            <a:schemeClr val="lt1"/>
+          </a:fontRef>
+        </p:style>
+        <p:txBody>
+          <a:bodyPr rtlCol="0" anchor="ctr" wrap="none"/>
+          <a:lstStyle/>
+          <a:p>
+            <a:pPr algn="ctr">
+              <a:defRPr sz="1000" b="1">
+                <a:solidFill>
+                  <a:srgbClr val="E11D48"/>
+                </a:solidFill>
+              </a:defRPr>
+            </a:pPr>
+            <a:r>
+              <a:t>PROBLEM STATEMENT</a:t>
+            </a:r>
+          </a:p>
+        </p:txBody>
+      </p:sp>
+      <p:sp>
+        <p:nvSpPr>
           <p:cNvPr id="9" name="TextBox 8"/>
           <p:cNvSpPr txBox="1"/>
           <p:nvPr/>
         </p:nvSpPr>
         <p:spPr>
           <a:xfrm>
-            <a:off x="8302752" y="1737360"/>
-            <a:ext cx="2962656" cy="4389120"/>
+            <a:off x="731520" y="1508760"/>
+            <a:ext cx="5029200" cy="1691640"/>
           </a:xfrm>
           <a:prstGeom prst="rect">
             <a:avLst/>
@@ -3703,38 +3896,920 @@
           <a:p>
             <a:pPr>
               <a:spcAft>
-                <a:spcPts val="1000"/>
+                <a:spcPts val="600"/>
               </a:spcAft>
-              <a:defRPr sz="1600" b="1">
-                <a:solidFill>
-                  <a:srgbClr val="2563EB"/>
-                </a:solidFill>
-              </a:defRPr>
-            </a:pPr>
-            <a:r>
-              <a:t>3. Responder Hazard &amp; Latency</a:t>
+              <a:defRPr sz="1050" b="1">
+                <a:solidFill>
+                  <a:srgbClr val="0F172A"/>
+                </a:solidFill>
+              </a:defRPr>
+            </a:pPr>
+            <a:r>
+              <a:t>During catastrophic events (e.g. Wayanad landslides, earthquakes), first responders encounter critical operational bottlenecks:</a:t>
             </a:r>
           </a:p>
           <a:p>
             <a:pPr>
-              <a:defRPr sz="1300">
+              <a:defRPr sz="950">
                 <a:solidFill>
                   <a:srgbClr val="1E293B"/>
                 </a:solidFill>
               </a:defRPr>
             </a:pPr>
             <a:r>
-              <a:t>• High Mortality Curve: Victim survival drops precipitously after the first 72 hours; manual foot sweeps take days to cover a 2 km² disaster area.</a:t>
-            </a:r>
-            <a:br/>
-            <a:br/>
-            <a:r>
-              <a:t>• Secondary Disasters: Responders walk blindly into secondary hazards: active gas leaks, submerged live powerlines, and unstable structural slopes.</a:t>
-            </a:r>
-            <a:br/>
-            <a:br/>
-            <a:r>
-              <a:t>• Solution Mandate: Need rapid autonomous aerial triage before deploying ground rescuers.</a:t>
+              <a:t>• Comms Blackout: Cellular towers &amp; power grids severed; cloud-AI drones are 100% inoperable.</a:t>
+            </a:r>
+            <a:br/>
+            <a:r>
+              <a:t>• Environmental Blindness: Mud slush, fog, and darkness camouflage trapped survivors.</a:t>
+            </a:r>
+            <a:br/>
+            <a:r>
+              <a:t>• High Mortality Curve: The 'Golden 72 Hours' expire before slow manual foot sweeps cover rubble.</a:t>
+            </a:r>
+            <a:br/>
+            <a:r>
+              <a:t>• Responder Hazards: Crews walk blindly into secondary cave-ins, gas leaks, and live cables.</a:t>
+            </a:r>
+          </a:p>
+        </p:txBody>
+      </p:sp>
+      <p:sp>
+        <p:nvSpPr>
+          <p:cNvPr id="10" name="Rounded Rectangle 9"/>
+          <p:cNvSpPr/>
+          <p:nvPr/>
+        </p:nvSpPr>
+        <p:spPr>
+          <a:xfrm>
+            <a:off x="6217920" y="1005840"/>
+            <a:ext cx="5394960" cy="2286000"/>
+          </a:xfrm>
+          <a:prstGeom prst="roundRect">
+            <a:avLst/>
+          </a:prstGeom>
+          <a:solidFill>
+            <a:srgbClr val="FFFFFF"/>
+          </a:solidFill>
+          <a:ln w="15240">
+            <a:solidFill>
+              <a:srgbClr val="99F6E4"/>
+            </a:solidFill>
+          </a:ln>
+        </p:spPr>
+        <p:style>
+          <a:lnRef idx="1">
+            <a:schemeClr val="accent1"/>
+          </a:lnRef>
+          <a:fillRef idx="3">
+            <a:schemeClr val="accent1"/>
+          </a:fillRef>
+          <a:effectRef idx="2">
+            <a:schemeClr val="accent1"/>
+          </a:effectRef>
+          <a:fontRef idx="minor">
+            <a:schemeClr val="lt1"/>
+          </a:fontRef>
+        </p:style>
+        <p:txBody>
+          <a:bodyPr rtlCol="0" anchor="ctr"/>
+          <a:lstStyle/>
+          <a:p>
+            <a:pPr algn="ctr"/>
+          </a:p>
+        </p:txBody>
+      </p:sp>
+      <p:sp>
+        <p:nvSpPr>
+          <p:cNvPr id="11" name="Rounded Rectangle 10"/>
+          <p:cNvSpPr/>
+          <p:nvPr/>
+        </p:nvSpPr>
+        <p:spPr>
+          <a:xfrm>
+            <a:off x="6400800" y="1143000"/>
+            <a:ext cx="1645920" cy="292608"/>
+          </a:xfrm>
+          <a:prstGeom prst="roundRect">
+            <a:avLst/>
+          </a:prstGeom>
+          <a:solidFill>
+            <a:srgbClr val="F0FDFA"/>
+          </a:solidFill>
+          <a:ln w="12700">
+            <a:solidFill>
+              <a:srgbClr val="99F6E4"/>
+            </a:solidFill>
+          </a:ln>
+        </p:spPr>
+        <p:style>
+          <a:lnRef idx="1">
+            <a:schemeClr val="accent1"/>
+          </a:lnRef>
+          <a:fillRef idx="3">
+            <a:schemeClr val="accent1"/>
+          </a:fillRef>
+          <a:effectRef idx="2">
+            <a:schemeClr val="accent1"/>
+          </a:effectRef>
+          <a:fontRef idx="minor">
+            <a:schemeClr val="lt1"/>
+          </a:fontRef>
+        </p:style>
+        <p:txBody>
+          <a:bodyPr rtlCol="0" anchor="ctr" wrap="none"/>
+          <a:lstStyle/>
+          <a:p>
+            <a:pPr algn="ctr">
+              <a:defRPr sz="1000" b="1">
+                <a:solidFill>
+                  <a:srgbClr val="0D9488"/>
+                </a:solidFill>
+              </a:defRPr>
+            </a:pPr>
+            <a:r>
+              <a:t>PROPOSED SOLUTION</a:t>
+            </a:r>
+          </a:p>
+        </p:txBody>
+      </p:sp>
+      <p:sp>
+        <p:nvSpPr>
+          <p:cNvPr id="12" name="TextBox 11"/>
+          <p:cNvSpPr txBox="1"/>
+          <p:nvPr/>
+        </p:nvSpPr>
+        <p:spPr>
+          <a:xfrm>
+            <a:off x="6400800" y="1508760"/>
+            <a:ext cx="5029200" cy="1691640"/>
+          </a:xfrm>
+          <a:prstGeom prst="rect">
+            <a:avLst/>
+          </a:prstGeom>
+          <a:noFill/>
+        </p:spPr>
+        <p:txBody>
+          <a:bodyPr wrap="square">
+            <a:spAutoFit/>
+          </a:bodyPr>
+          <a:lstStyle/>
+          <a:p>
+            <a:pPr>
+              <a:spcAft>
+                <a:spcPts val="600"/>
+              </a:spcAft>
+              <a:defRPr sz="1050" b="1">
+                <a:solidFill>
+                  <a:srgbClr val="0F172A"/>
+                </a:solidFill>
+              </a:defRPr>
+            </a:pPr>
+            <a:r>
+              <a:t>Project Phoenix: An autonomous, field-deployable multirotor scout engineered for offline disaster zones:</a:t>
+            </a:r>
+          </a:p>
+          <a:p>
+            <a:pPr>
+              <a:defRPr sz="950">
+                <a:solidFill>
+                  <a:srgbClr val="1E293B"/>
+                </a:solidFill>
+              </a:defRPr>
+            </a:pPr>
+            <a:r>
+              <a:t>• 100% On-Device Edge AI: Executes real-time vision on Qualcomm silicon without internet.</a:t>
+            </a:r>
+            <a:br/>
+            <a:r>
+              <a:t>• Multi-Spectral Vision: Fuses 4K RGB with LWIR Thermal (8-14μm) to spot living body heat (37°C).</a:t>
+            </a:r>
+            <a:br/>
+            <a:r>
+              <a:t>• Tait-Bryan Ray-Casting: Calculates victim Lat/Long GPS coordinates instantly from altitude.</a:t>
+            </a:r>
+            <a:br/>
+            <a:r>
+              <a:t>• Offline Tactical GCS: Streams priority triage queues and safe rescue routes to local tablets.</a:t>
+            </a:r>
+          </a:p>
+        </p:txBody>
+      </p:sp>
+      <p:sp>
+        <p:nvSpPr>
+          <p:cNvPr id="13" name="Rounded Rectangle 12"/>
+          <p:cNvSpPr/>
+          <p:nvPr/>
+        </p:nvSpPr>
+        <p:spPr>
+          <a:xfrm>
+            <a:off x="548640" y="3429000"/>
+            <a:ext cx="2011680" cy="274320"/>
+          </a:xfrm>
+          <a:prstGeom prst="roundRect">
+            <a:avLst/>
+          </a:prstGeom>
+          <a:solidFill>
+            <a:srgbClr val="F5F3FF"/>
+          </a:solidFill>
+          <a:ln w="12700">
+            <a:solidFill>
+              <a:srgbClr val="DDD6FE"/>
+            </a:solidFill>
+          </a:ln>
+        </p:spPr>
+        <p:style>
+          <a:lnRef idx="1">
+            <a:schemeClr val="accent1"/>
+          </a:lnRef>
+          <a:fillRef idx="3">
+            <a:schemeClr val="accent1"/>
+          </a:fillRef>
+          <a:effectRef idx="2">
+            <a:schemeClr val="accent1"/>
+          </a:effectRef>
+          <a:fontRef idx="minor">
+            <a:schemeClr val="lt1"/>
+          </a:fontRef>
+        </p:style>
+        <p:txBody>
+          <a:bodyPr rtlCol="0" anchor="ctr" wrap="none"/>
+          <a:lstStyle/>
+          <a:p>
+            <a:pPr algn="ctr">
+              <a:defRPr sz="1000" b="1">
+                <a:solidFill>
+                  <a:srgbClr val="7C3AED"/>
+                </a:solidFill>
+              </a:defRPr>
+            </a:pPr>
+            <a:r>
+              <a:t>INNOVATION / UNIQUENESS</a:t>
+            </a:r>
+          </a:p>
+        </p:txBody>
+      </p:sp>
+      <p:sp>
+        <p:nvSpPr>
+          <p:cNvPr id="14" name="Rounded Rectangle 13"/>
+          <p:cNvSpPr/>
+          <p:nvPr/>
+        </p:nvSpPr>
+        <p:spPr>
+          <a:xfrm>
+            <a:off x="548640" y="3794760"/>
+            <a:ext cx="2103120" cy="1188720"/>
+          </a:xfrm>
+          <a:prstGeom prst="roundRect">
+            <a:avLst/>
+          </a:prstGeom>
+          <a:solidFill>
+            <a:srgbClr val="FFFFFF"/>
+          </a:solidFill>
+          <a:ln w="15240">
+            <a:solidFill>
+              <a:srgbClr val="DDD6FE"/>
+            </a:solidFill>
+          </a:ln>
+        </p:spPr>
+        <p:style>
+          <a:lnRef idx="1">
+            <a:schemeClr val="accent1"/>
+          </a:lnRef>
+          <a:fillRef idx="3">
+            <a:schemeClr val="accent1"/>
+          </a:fillRef>
+          <a:effectRef idx="2">
+            <a:schemeClr val="accent1"/>
+          </a:effectRef>
+          <a:fontRef idx="minor">
+            <a:schemeClr val="lt1"/>
+          </a:fontRef>
+        </p:style>
+        <p:txBody>
+          <a:bodyPr rtlCol="0" anchor="ctr"/>
+          <a:lstStyle/>
+          <a:p>
+            <a:pPr algn="ctr"/>
+          </a:p>
+        </p:txBody>
+      </p:sp>
+      <p:sp>
+        <p:nvSpPr>
+          <p:cNvPr id="15" name="TextBox 14"/>
+          <p:cNvSpPr txBox="1"/>
+          <p:nvPr/>
+        </p:nvSpPr>
+        <p:spPr>
+          <a:xfrm>
+            <a:off x="621792" y="3840480"/>
+            <a:ext cx="1956816" cy="1097280"/>
+          </a:xfrm>
+          <a:prstGeom prst="rect">
+            <a:avLst/>
+          </a:prstGeom>
+          <a:noFill/>
+        </p:spPr>
+        <p:txBody>
+          <a:bodyPr wrap="square">
+            <a:spAutoFit/>
+          </a:bodyPr>
+          <a:lstStyle/>
+          <a:p>
+            <a:pPr>
+              <a:spcAft>
+                <a:spcPts val="200"/>
+              </a:spcAft>
+              <a:defRPr sz="1000" b="1">
+                <a:solidFill>
+                  <a:srgbClr val="7C3AED"/>
+                </a:solidFill>
+              </a:defRPr>
+            </a:pPr>
+            <a:r>
+              <a:t>Dual-Brain Architecture</a:t>
+            </a:r>
+          </a:p>
+          <a:p>
+            <a:pPr>
+              <a:defRPr sz="850">
+                <a:solidFill>
+                  <a:srgbClr val="1E293B"/>
+                </a:solidFill>
+              </a:defRPr>
+            </a:pPr>
+            <a:r>
+              <a:t>Arduino UNO Q combining Qualcomm QRB2210 MPU + STM32U5 MCU in 40g.</a:t>
+            </a:r>
+          </a:p>
+        </p:txBody>
+      </p:sp>
+      <p:sp>
+        <p:nvSpPr>
+          <p:cNvPr id="16" name="Rounded Rectangle 15"/>
+          <p:cNvSpPr/>
+          <p:nvPr/>
+        </p:nvSpPr>
+        <p:spPr>
+          <a:xfrm>
+            <a:off x="2788920" y="3794760"/>
+            <a:ext cx="2103120" cy="1188720"/>
+          </a:xfrm>
+          <a:prstGeom prst="roundRect">
+            <a:avLst/>
+          </a:prstGeom>
+          <a:solidFill>
+            <a:srgbClr val="FFFFFF"/>
+          </a:solidFill>
+          <a:ln w="15240">
+            <a:solidFill>
+              <a:srgbClr val="DDD6FE"/>
+            </a:solidFill>
+          </a:ln>
+        </p:spPr>
+        <p:style>
+          <a:lnRef idx="1">
+            <a:schemeClr val="accent1"/>
+          </a:lnRef>
+          <a:fillRef idx="3">
+            <a:schemeClr val="accent1"/>
+          </a:fillRef>
+          <a:effectRef idx="2">
+            <a:schemeClr val="accent1"/>
+          </a:effectRef>
+          <a:fontRef idx="minor">
+            <a:schemeClr val="lt1"/>
+          </a:fontRef>
+        </p:style>
+        <p:txBody>
+          <a:bodyPr rtlCol="0" anchor="ctr"/>
+          <a:lstStyle/>
+          <a:p>
+            <a:pPr algn="ctr"/>
+          </a:p>
+        </p:txBody>
+      </p:sp>
+      <p:sp>
+        <p:nvSpPr>
+          <p:cNvPr id="17" name="TextBox 16"/>
+          <p:cNvSpPr txBox="1"/>
+          <p:nvPr/>
+        </p:nvSpPr>
+        <p:spPr>
+          <a:xfrm>
+            <a:off x="2862072" y="3840480"/>
+            <a:ext cx="1956816" cy="1097280"/>
+          </a:xfrm>
+          <a:prstGeom prst="rect">
+            <a:avLst/>
+          </a:prstGeom>
+          <a:noFill/>
+        </p:spPr>
+        <p:txBody>
+          <a:bodyPr wrap="square">
+            <a:spAutoFit/>
+          </a:bodyPr>
+          <a:lstStyle/>
+          <a:p>
+            <a:pPr>
+              <a:spcAft>
+                <a:spcPts val="200"/>
+              </a:spcAft>
+              <a:defRPr sz="1000" b="1">
+                <a:solidFill>
+                  <a:srgbClr val="7C3AED"/>
+                </a:solidFill>
+              </a:defRPr>
+            </a:pPr>
+            <a:r>
+              <a:t>Sub-5W Edge YOLO</a:t>
+            </a:r>
+          </a:p>
+          <a:p>
+            <a:pPr>
+              <a:defRPr sz="850">
+                <a:solidFill>
+                  <a:srgbClr val="1E293B"/>
+                </a:solidFill>
+              </a:defRPr>
+            </a:pPr>
+            <a:r>
+              <a:t>INT8 quantized neural model running on NPU; preserves 90% power for flight.</a:t>
+            </a:r>
+          </a:p>
+        </p:txBody>
+      </p:sp>
+      <p:sp>
+        <p:nvSpPr>
+          <p:cNvPr id="18" name="Rounded Rectangle 17"/>
+          <p:cNvSpPr/>
+          <p:nvPr/>
+        </p:nvSpPr>
+        <p:spPr>
+          <a:xfrm>
+            <a:off x="5029200" y="3794760"/>
+            <a:ext cx="2103120" cy="1188720"/>
+          </a:xfrm>
+          <a:prstGeom prst="roundRect">
+            <a:avLst/>
+          </a:prstGeom>
+          <a:solidFill>
+            <a:srgbClr val="FFFFFF"/>
+          </a:solidFill>
+          <a:ln w="15240">
+            <a:solidFill>
+              <a:srgbClr val="DDD6FE"/>
+            </a:solidFill>
+          </a:ln>
+        </p:spPr>
+        <p:style>
+          <a:lnRef idx="1">
+            <a:schemeClr val="accent1"/>
+          </a:lnRef>
+          <a:fillRef idx="3">
+            <a:schemeClr val="accent1"/>
+          </a:fillRef>
+          <a:effectRef idx="2">
+            <a:schemeClr val="accent1"/>
+          </a:effectRef>
+          <a:fontRef idx="minor">
+            <a:schemeClr val="lt1"/>
+          </a:fontRef>
+        </p:style>
+        <p:txBody>
+          <a:bodyPr rtlCol="0" anchor="ctr"/>
+          <a:lstStyle/>
+          <a:p>
+            <a:pPr algn="ctr"/>
+          </a:p>
+        </p:txBody>
+      </p:sp>
+      <p:sp>
+        <p:nvSpPr>
+          <p:cNvPr id="19" name="TextBox 18"/>
+          <p:cNvSpPr txBox="1"/>
+          <p:nvPr/>
+        </p:nvSpPr>
+        <p:spPr>
+          <a:xfrm>
+            <a:off x="5102352" y="3840480"/>
+            <a:ext cx="1956816" cy="1097280"/>
+          </a:xfrm>
+          <a:prstGeom prst="rect">
+            <a:avLst/>
+          </a:prstGeom>
+          <a:noFill/>
+        </p:spPr>
+        <p:txBody>
+          <a:bodyPr wrap="square">
+            <a:spAutoFit/>
+          </a:bodyPr>
+          <a:lstStyle/>
+          <a:p>
+            <a:pPr>
+              <a:spcAft>
+                <a:spcPts val="200"/>
+              </a:spcAft>
+              <a:defRPr sz="1000" b="1">
+                <a:solidFill>
+                  <a:srgbClr val="7C3AED"/>
+                </a:solidFill>
+              </a:defRPr>
+            </a:pPr>
+            <a:r>
+              <a:t>Ray-Cast Geolocation</a:t>
+            </a:r>
+          </a:p>
+          <a:p>
+            <a:pPr>
+              <a:defRPr sz="850">
+                <a:solidFill>
+                  <a:srgbClr val="1E293B"/>
+                </a:solidFill>
+              </a:defRPr>
+            </a:pPr>
+            <a:r>
+              <a:t>Tait-Bryan rotation matrix projects bounding boxes to ground GPS pins.</a:t>
+            </a:r>
+          </a:p>
+        </p:txBody>
+      </p:sp>
+      <p:sp>
+        <p:nvSpPr>
+          <p:cNvPr id="20" name="Rounded Rectangle 19"/>
+          <p:cNvSpPr/>
+          <p:nvPr/>
+        </p:nvSpPr>
+        <p:spPr>
+          <a:xfrm>
+            <a:off x="7269480" y="3794760"/>
+            <a:ext cx="2103120" cy="1188720"/>
+          </a:xfrm>
+          <a:prstGeom prst="roundRect">
+            <a:avLst/>
+          </a:prstGeom>
+          <a:solidFill>
+            <a:srgbClr val="FFFFFF"/>
+          </a:solidFill>
+          <a:ln w="15240">
+            <a:solidFill>
+              <a:srgbClr val="DDD6FE"/>
+            </a:solidFill>
+          </a:ln>
+        </p:spPr>
+        <p:style>
+          <a:lnRef idx="1">
+            <a:schemeClr val="accent1"/>
+          </a:lnRef>
+          <a:fillRef idx="3">
+            <a:schemeClr val="accent1"/>
+          </a:fillRef>
+          <a:effectRef idx="2">
+            <a:schemeClr val="accent1"/>
+          </a:effectRef>
+          <a:fontRef idx="minor">
+            <a:schemeClr val="lt1"/>
+          </a:fontRef>
+        </p:style>
+        <p:txBody>
+          <a:bodyPr rtlCol="0" anchor="ctr"/>
+          <a:lstStyle/>
+          <a:p>
+            <a:pPr algn="ctr"/>
+          </a:p>
+        </p:txBody>
+      </p:sp>
+      <p:sp>
+        <p:nvSpPr>
+          <p:cNvPr id="21" name="TextBox 20"/>
+          <p:cNvSpPr txBox="1"/>
+          <p:nvPr/>
+        </p:nvSpPr>
+        <p:spPr>
+          <a:xfrm>
+            <a:off x="7342632" y="3840480"/>
+            <a:ext cx="1956816" cy="1097280"/>
+          </a:xfrm>
+          <a:prstGeom prst="rect">
+            <a:avLst/>
+          </a:prstGeom>
+          <a:noFill/>
+        </p:spPr>
+        <p:txBody>
+          <a:bodyPr wrap="square">
+            <a:spAutoFit/>
+          </a:bodyPr>
+          <a:lstStyle/>
+          <a:p>
+            <a:pPr>
+              <a:spcAft>
+                <a:spcPts val="200"/>
+              </a:spcAft>
+              <a:defRPr sz="1000" b="1">
+                <a:solidFill>
+                  <a:srgbClr val="7C3AED"/>
+                </a:solidFill>
+              </a:defRPr>
+            </a:pPr>
+            <a:r>
+              <a:t>ROS-LoRa P2P Bridge</a:t>
+            </a:r>
+          </a:p>
+          <a:p>
+            <a:pPr>
+              <a:defRPr sz="850">
+                <a:solidFill>
+                  <a:srgbClr val="1E293B"/>
+                </a:solidFill>
+              </a:defRPr>
+            </a:pPr>
+            <a:r>
+              <a:t>17-byte bit-packed telemetry stream over 5+ km (Souli et al., Elsevier 2024).</a:t>
+            </a:r>
+          </a:p>
+        </p:txBody>
+      </p:sp>
+      <p:sp>
+        <p:nvSpPr>
+          <p:cNvPr id="22" name="Rounded Rectangle 21"/>
+          <p:cNvSpPr/>
+          <p:nvPr/>
+        </p:nvSpPr>
+        <p:spPr>
+          <a:xfrm>
+            <a:off x="9509760" y="3794760"/>
+            <a:ext cx="2103120" cy="1188720"/>
+          </a:xfrm>
+          <a:prstGeom prst="roundRect">
+            <a:avLst/>
+          </a:prstGeom>
+          <a:solidFill>
+            <a:srgbClr val="FFFFFF"/>
+          </a:solidFill>
+          <a:ln w="15240">
+            <a:solidFill>
+              <a:srgbClr val="DDD6FE"/>
+            </a:solidFill>
+          </a:ln>
+        </p:spPr>
+        <p:style>
+          <a:lnRef idx="1">
+            <a:schemeClr val="accent1"/>
+          </a:lnRef>
+          <a:fillRef idx="3">
+            <a:schemeClr val="accent1"/>
+          </a:fillRef>
+          <a:effectRef idx="2">
+            <a:schemeClr val="accent1"/>
+          </a:effectRef>
+          <a:fontRef idx="minor">
+            <a:schemeClr val="lt1"/>
+          </a:fontRef>
+        </p:style>
+        <p:txBody>
+          <a:bodyPr rtlCol="0" anchor="ctr"/>
+          <a:lstStyle/>
+          <a:p>
+            <a:pPr algn="ctr"/>
+          </a:p>
+        </p:txBody>
+      </p:sp>
+      <p:sp>
+        <p:nvSpPr>
+          <p:cNvPr id="23" name="TextBox 22"/>
+          <p:cNvSpPr txBox="1"/>
+          <p:nvPr/>
+        </p:nvSpPr>
+        <p:spPr>
+          <a:xfrm>
+            <a:off x="9582912" y="3840480"/>
+            <a:ext cx="1956816" cy="1097280"/>
+          </a:xfrm>
+          <a:prstGeom prst="rect">
+            <a:avLst/>
+          </a:prstGeom>
+          <a:noFill/>
+        </p:spPr>
+        <p:txBody>
+          <a:bodyPr wrap="square">
+            <a:spAutoFit/>
+          </a:bodyPr>
+          <a:lstStyle/>
+          <a:p>
+            <a:pPr>
+              <a:spcAft>
+                <a:spcPts val="200"/>
+              </a:spcAft>
+              <a:defRPr sz="1000" b="1">
+                <a:solidFill>
+                  <a:srgbClr val="7C3AED"/>
+                </a:solidFill>
+              </a:defRPr>
+            </a:pPr>
+            <a:r>
+              <a:t>Anti-Compass Drift VIO</a:t>
+            </a:r>
+          </a:p>
+          <a:p>
+            <a:pPr>
+              <a:defRPr sz="850">
+                <a:solidFill>
+                  <a:srgbClr val="1E293B"/>
+                </a:solidFill>
+              </a:defRPr>
+            </a:pPr>
+            <a:r>
+              <a:t>Visual Odometry heading overrides magnetometer in steel rubble (Bouabdallah 2007).</a:t>
+            </a:r>
+          </a:p>
+        </p:txBody>
+      </p:sp>
+      <p:sp>
+        <p:nvSpPr>
+          <p:cNvPr id="24" name="Rounded Rectangle 23"/>
+          <p:cNvSpPr/>
+          <p:nvPr/>
+        </p:nvSpPr>
+        <p:spPr>
+          <a:xfrm>
+            <a:off x="548640" y="5120640"/>
+            <a:ext cx="5394960" cy="1280160"/>
+          </a:xfrm>
+          <a:prstGeom prst="roundRect">
+            <a:avLst/>
+          </a:prstGeom>
+          <a:solidFill>
+            <a:srgbClr val="FFF1F2"/>
+          </a:solidFill>
+          <a:ln w="15240">
+            <a:solidFill>
+              <a:srgbClr val="FECDD3"/>
+            </a:solidFill>
+          </a:ln>
+        </p:spPr>
+        <p:style>
+          <a:lnRef idx="1">
+            <a:schemeClr val="accent1"/>
+          </a:lnRef>
+          <a:fillRef idx="3">
+            <a:schemeClr val="accent1"/>
+          </a:fillRef>
+          <a:effectRef idx="2">
+            <a:schemeClr val="accent1"/>
+          </a:effectRef>
+          <a:fontRef idx="minor">
+            <a:schemeClr val="lt1"/>
+          </a:fontRef>
+        </p:style>
+        <p:txBody>
+          <a:bodyPr rtlCol="0" anchor="ctr"/>
+          <a:lstStyle/>
+          <a:p>
+            <a:pPr algn="ctr"/>
+          </a:p>
+        </p:txBody>
+      </p:sp>
+      <p:sp>
+        <p:nvSpPr>
+          <p:cNvPr id="25" name="TextBox 24"/>
+          <p:cNvSpPr txBox="1"/>
+          <p:nvPr/>
+        </p:nvSpPr>
+        <p:spPr>
+          <a:xfrm>
+            <a:off x="731520" y="5166360"/>
+            <a:ext cx="5029200" cy="1188720"/>
+          </a:xfrm>
+          <a:prstGeom prst="rect">
+            <a:avLst/>
+          </a:prstGeom>
+          <a:noFill/>
+        </p:spPr>
+        <p:txBody>
+          <a:bodyPr wrap="square">
+            <a:spAutoFit/>
+          </a:bodyPr>
+          <a:lstStyle/>
+          <a:p>
+            <a:pPr>
+              <a:spcAft>
+                <a:spcPts val="200"/>
+              </a:spcAft>
+              <a:defRPr sz="1000" b="1">
+                <a:solidFill>
+                  <a:srgbClr val="E11D48"/>
+                </a:solidFill>
+              </a:defRPr>
+            </a:pPr>
+            <a:r>
+              <a:t>TRADITIONAL DISASTER SEARCH (Current Approach)</a:t>
+            </a:r>
+          </a:p>
+          <a:p>
+            <a:pPr>
+              <a:defRPr sz="950">
+                <a:solidFill>
+                  <a:srgbClr val="1E293B"/>
+                </a:solidFill>
+              </a:defRPr>
+            </a:pPr>
+            <a:r>
+              <a:t>Manual Foot Sweeps ➔ Blind Rubble Digging ➔ Stalled at Sunset (Darkness) ➔ High Responder Casualty Risk ➔ Critical Hours Lost</a:t>
+            </a:r>
+          </a:p>
+        </p:txBody>
+      </p:sp>
+      <p:sp>
+        <p:nvSpPr>
+          <p:cNvPr id="26" name="Rounded Rectangle 25"/>
+          <p:cNvSpPr/>
+          <p:nvPr/>
+        </p:nvSpPr>
+        <p:spPr>
+          <a:xfrm>
+            <a:off x="6217920" y="5120640"/>
+            <a:ext cx="5394960" cy="1280160"/>
+          </a:xfrm>
+          <a:prstGeom prst="roundRect">
+            <a:avLst/>
+          </a:prstGeom>
+          <a:solidFill>
+            <a:srgbClr val="F0FDFA"/>
+          </a:solidFill>
+          <a:ln w="15240">
+            <a:solidFill>
+              <a:srgbClr val="99F6E4"/>
+            </a:solidFill>
+          </a:ln>
+        </p:spPr>
+        <p:style>
+          <a:lnRef idx="1">
+            <a:schemeClr val="accent1"/>
+          </a:lnRef>
+          <a:fillRef idx="3">
+            <a:schemeClr val="accent1"/>
+          </a:fillRef>
+          <a:effectRef idx="2">
+            <a:schemeClr val="accent1"/>
+          </a:effectRef>
+          <a:fontRef idx="minor">
+            <a:schemeClr val="lt1"/>
+          </a:fontRef>
+        </p:style>
+        <p:txBody>
+          <a:bodyPr rtlCol="0" anchor="ctr"/>
+          <a:lstStyle/>
+          <a:p>
+            <a:pPr algn="ctr"/>
+          </a:p>
+        </p:txBody>
+      </p:sp>
+      <p:sp>
+        <p:nvSpPr>
+          <p:cNvPr id="27" name="TextBox 26"/>
+          <p:cNvSpPr txBox="1"/>
+          <p:nvPr/>
+        </p:nvSpPr>
+        <p:spPr>
+          <a:xfrm>
+            <a:off x="6400800" y="5166360"/>
+            <a:ext cx="5029200" cy="1188720"/>
+          </a:xfrm>
+          <a:prstGeom prst="rect">
+            <a:avLst/>
+          </a:prstGeom>
+          <a:noFill/>
+        </p:spPr>
+        <p:txBody>
+          <a:bodyPr wrap="square">
+            <a:spAutoFit/>
+          </a:bodyPr>
+          <a:lstStyle/>
+          <a:p>
+            <a:pPr>
+              <a:spcAft>
+                <a:spcPts val="200"/>
+              </a:spcAft>
+              <a:defRPr sz="1000" b="1">
+                <a:solidFill>
+                  <a:srgbClr val="0D9488"/>
+                </a:solidFill>
+              </a:defRPr>
+            </a:pPr>
+            <a:r>
+              <a:t>PHOENIX AUTONOMOUS SAR (Our Approach)</a:t>
+            </a:r>
+          </a:p>
+          <a:p>
+            <a:pPr>
+              <a:defRPr sz="950">
+                <a:solidFill>
+                  <a:srgbClr val="1E293B"/>
+                </a:solidFill>
+              </a:defRPr>
+            </a:pPr>
+            <a:r>
+              <a:t>Autonomous Aerial Sweep ➔ 24/7 Thermal Night Vision ➔ Instant Survivor GPS Raycasting ➔ Zero-Drop LoRa Telemetry ➔ Safe Responder Path Routing</a:t>
             </a:r>
           </a:p>
         </p:txBody>
@@ -3759,75 +4834,23 @@
       <p:grpSpPr/>
       <p:sp>
         <p:nvSpPr>
-          <p:cNvPr id="2" name="TextBox 1"/>
-          <p:cNvSpPr txBox="1"/>
-          <p:nvPr/>
-        </p:nvSpPr>
-        <p:spPr>
-          <a:xfrm>
-            <a:off x="731520" y="365760"/>
-            <a:ext cx="10698480" cy="1005840"/>
+          <p:cNvPr id="2" name="Rectangle 1"/>
+          <p:cNvSpPr/>
+          <p:nvPr/>
+        </p:nvSpPr>
+        <p:spPr>
+          <a:xfrm>
+            <a:off x="0" y="0"/>
+            <a:ext cx="12191695" cy="6858000"/>
           </a:xfrm>
           <a:prstGeom prst="rect">
             <a:avLst/>
           </a:prstGeom>
-          <a:noFill/>
-        </p:spPr>
-        <p:txBody>
-          <a:bodyPr wrap="square" lIns="0" tIns="0" rIns="0" bIns="0">
-            <a:spAutoFit/>
-          </a:bodyPr>
-          <a:lstStyle/>
-          <a:p>
-            <a:pPr>
-              <a:spcAft>
-                <a:spcPts val="400"/>
-              </a:spcAft>
-              <a:defRPr sz="1000" b="1">
-                <a:solidFill>
-                  <a:srgbClr val="F59E0B"/>
-                </a:solidFill>
-              </a:defRPr>
-            </a:pPr>
-            <a:r>
-              <a:t>SMART INDIA HACKATHON 2026 | PROBLEM STATEMENT ID: SIH26177</a:t>
-            </a:r>
-          </a:p>
-          <a:p>
-            <a:pPr>
-              <a:defRPr sz="2200" b="1">
-                <a:solidFill>
-                  <a:srgbClr val="0F172A"/>
-                </a:solidFill>
-              </a:defRPr>
-            </a:pPr>
-            <a:r>
-              <a:t>Proposed Solution: Project Phoenix Autonomous SAR UAV</a:t>
-            </a:r>
-          </a:p>
-        </p:txBody>
-      </p:sp>
-      <p:sp>
-        <p:nvSpPr>
-          <p:cNvPr id="3" name="Rectangle 2"/>
-          <p:cNvSpPr/>
-          <p:nvPr/>
-        </p:nvSpPr>
-        <p:spPr>
-          <a:xfrm>
-            <a:off x="731520" y="1325880"/>
-            <a:ext cx="10698480" cy="36576"/>
-          </a:xfrm>
-          <a:prstGeom prst="rect">
-            <a:avLst/>
-          </a:prstGeom>
           <a:solidFill>
-            <a:srgbClr val="F59E0B"/>
+            <a:srgbClr val="F8FAFC"/>
           </a:solidFill>
           <a:ln>
-            <a:solidFill>
-              <a:srgbClr val="F59E0B"/>
-            </a:solidFill>
+            <a:noFill/>
           </a:ln>
         </p:spPr>
         <p:style>
@@ -3854,14 +4877,14 @@
       </p:sp>
       <p:sp>
         <p:nvSpPr>
-          <p:cNvPr id="4" name="Rounded Rectangle 3"/>
+          <p:cNvPr id="3" name="Rounded Rectangle 2"/>
           <p:cNvSpPr/>
           <p:nvPr/>
         </p:nvSpPr>
         <p:spPr>
           <a:xfrm>
-            <a:off x="731520" y="1554480"/>
-            <a:ext cx="5166360" cy="4754880"/>
+            <a:off x="548640" y="320040"/>
+            <a:ext cx="1645920" cy="502920"/>
           </a:xfrm>
           <a:prstGeom prst="roundRect">
             <a:avLst/>
@@ -3869,7 +4892,7 @@
           <a:solidFill>
             <a:srgbClr val="FFFFFF"/>
           </a:solidFill>
-          <a:ln w="19050">
+          <a:ln w="12700">
             <a:solidFill>
               <a:srgbClr val="E2E8F0"/>
             </a:solidFill>
@@ -3893,20 +4916,29 @@
           <a:bodyPr rtlCol="0" anchor="ctr"/>
           <a:lstStyle/>
           <a:p>
-            <a:pPr algn="ctr"/>
-          </a:p>
-        </p:txBody>
-      </p:sp>
-      <p:sp>
-        <p:nvSpPr>
-          <p:cNvPr id="5" name="TextBox 4"/>
+            <a:pPr algn="ctr">
+              <a:defRPr sz="1300" b="1">
+                <a:solidFill>
+                  <a:srgbClr val="0F172A"/>
+                </a:solidFill>
+              </a:defRPr>
+            </a:pPr>
+            <a:r>
+              <a:t>PHOENIX</a:t>
+            </a:r>
+          </a:p>
+        </p:txBody>
+      </p:sp>
+      <p:sp>
+        <p:nvSpPr>
+          <p:cNvPr id="4" name="TextBox 3"/>
           <p:cNvSpPr txBox="1"/>
           <p:nvPr/>
         </p:nvSpPr>
         <p:spPr>
           <a:xfrm>
-            <a:off x="914400" y="1737360"/>
-            <a:ext cx="4800600" cy="4389120"/>
+            <a:off x="2377440" y="292608"/>
+            <a:ext cx="7315200" cy="594360"/>
           </a:xfrm>
           <a:prstGeom prst="rect">
             <a:avLst/>
@@ -3919,75 +4951,77 @@
           </a:bodyPr>
           <a:lstStyle/>
           <a:p>
-            <a:pPr>
-              <a:spcAft>
-                <a:spcPts val="1000"/>
-              </a:spcAft>
-              <a:defRPr sz="1800" b="1">
+            <a:pPr algn="ctr">
+              <a:defRPr sz="2000" b="1">
                 <a:solidFill>
                   <a:srgbClr val="0F172A"/>
                 </a:solidFill>
               </a:defRPr>
             </a:pPr>
             <a:r>
-              <a:t>Core Solution Overview</a:t>
-            </a:r>
-          </a:p>
-          <a:p>
-            <a:pPr>
-              <a:defRPr sz="1300">
-                <a:solidFill>
-                  <a:srgbClr val="1E293B"/>
-                </a:solidFill>
-              </a:defRPr>
-            </a:pPr>
-            <a:r>
-              <a:t>Project Phoenix is a deployable autonomous multirotor UAV designed to act as an offline-first aerial reconnaissance scout for NDRF and SDRF teams:</a:t>
-            </a:r>
-            <a:br/>
-            <a:br/>
-            <a:r>
-              <a:t>• 100% Onboard Edge Intelligence: Operates without internet, cellular connectivity, or external cloud infrastructure.</a:t>
-            </a:r>
-            <a:br/>
-            <a:br/>
-            <a:r>
-              <a:t>• Multi-Spectral Vision Core: Co-registered RGB + Long-Wave Infrared (LWIR) thermal sensors detect living human body heat signatures (36°C-38°C) through smoke, mud, and total night darkness.</a:t>
-            </a:r>
-            <a:br/>
-            <a:br/>
-            <a:r>
-              <a:t>• Tait-Bryan Ray-Casting Geolocation: Instantly converts 2D bounding boxes into real-world GPS coordinates without hovering overhead.</a:t>
-            </a:r>
-            <a:br/>
-            <a:br/>
-            <a:r>
-              <a:t>• Offline Responder GCS: Displays live victim pins, hazard heatmaps, and shortest hazard-free ground rescue routes on a local tablet.</a:t>
-            </a:r>
-          </a:p>
-        </p:txBody>
-      </p:sp>
-      <p:sp>
-        <p:nvSpPr>
-          <p:cNvPr id="6" name="Rounded Rectangle 5"/>
+              <a:t>Technical Approach: Dual-Brain Architecture &amp; Workflow</a:t>
+            </a:r>
+          </a:p>
+        </p:txBody>
+      </p:sp>
+      <p:sp>
+        <p:nvSpPr>
+          <p:cNvPr id="5" name="TextBox 4"/>
+          <p:cNvSpPr txBox="1"/>
+          <p:nvPr/>
+        </p:nvSpPr>
+        <p:spPr>
+          <a:xfrm>
+            <a:off x="9875520" y="274320"/>
+            <a:ext cx="1828800" cy="594360"/>
+          </a:xfrm>
+          <a:prstGeom prst="rect">
+            <a:avLst/>
+          </a:prstGeom>
+          <a:noFill/>
+        </p:spPr>
+        <p:txBody>
+          <a:bodyPr wrap="none">
+            <a:spAutoFit/>
+          </a:bodyPr>
+          <a:lstStyle/>
+          <a:p>
+            <a:pPr algn="r">
+              <a:defRPr sz="950" b="1">
+                <a:solidFill>
+                  <a:srgbClr val="0F172A"/>
+                </a:solidFill>
+              </a:defRPr>
+            </a:pPr>
+            <a:r>
+              <a:t>SMART INDIA</a:t>
+            </a:r>
+            <a:br/>
+            <a:r>
+              <a:t>HACKATHON 2026</a:t>
+            </a:r>
+          </a:p>
+        </p:txBody>
+      </p:sp>
+      <p:sp>
+        <p:nvSpPr>
+          <p:cNvPr id="6" name="Rectangle 5"/>
           <p:cNvSpPr/>
           <p:nvPr/>
         </p:nvSpPr>
         <p:spPr>
           <a:xfrm>
-            <a:off x="6263640" y="1554480"/>
-            <a:ext cx="5166360" cy="4754880"/>
-          </a:xfrm>
-          <a:prstGeom prst="roundRect">
+            <a:off x="0" y="6537960"/>
+            <a:ext cx="12191695" cy="320040"/>
+          </a:xfrm>
+          <a:prstGeom prst="rect">
             <a:avLst/>
           </a:prstGeom>
           <a:solidFill>
-            <a:srgbClr val="FFFFFF"/>
+            <a:srgbClr val="0F172A"/>
           </a:solidFill>
-          <a:ln w="19050">
-            <a:solidFill>
-              <a:srgbClr val="E2E8F0"/>
-            </a:solidFill>
+          <a:ln>
+            <a:noFill/>
           </a:ln>
         </p:spPr>
         <p:style>
@@ -4008,20 +5042,128 @@
           <a:bodyPr rtlCol="0" anchor="ctr"/>
           <a:lstStyle/>
           <a:p>
+            <a:pPr algn="ctr">
+              <a:defRPr sz="900">
+                <a:solidFill>
+                  <a:srgbClr val="FFFFFF"/>
+                </a:solidFill>
+              </a:defRPr>
+            </a:pPr>
+            <a:r>
+              <a:t>PROJECT PHOENIX: Autonomous Multi-Spectral Edge-AI UAV  |  SIH26177 (Qualcomm Inc.)                                                                   Slide 3</a:t>
+            </a:r>
+          </a:p>
+        </p:txBody>
+      </p:sp>
+      <p:sp>
+        <p:nvSpPr>
+          <p:cNvPr id="7" name="Rounded Rectangle 6"/>
+          <p:cNvSpPr/>
+          <p:nvPr/>
+        </p:nvSpPr>
+        <p:spPr>
+          <a:xfrm>
+            <a:off x="548640" y="1005840"/>
+            <a:ext cx="6217920" cy="5394960"/>
+          </a:xfrm>
+          <a:prstGeom prst="roundRect">
+            <a:avLst/>
+          </a:prstGeom>
+          <a:solidFill>
+            <a:srgbClr val="FFFFFF"/>
+          </a:solidFill>
+          <a:ln w="15240">
+            <a:solidFill>
+              <a:srgbClr val="E2E8F0"/>
+            </a:solidFill>
+          </a:ln>
+        </p:spPr>
+        <p:style>
+          <a:lnRef idx="1">
+            <a:schemeClr val="accent1"/>
+          </a:lnRef>
+          <a:fillRef idx="3">
+            <a:schemeClr val="accent1"/>
+          </a:fillRef>
+          <a:effectRef idx="2">
+            <a:schemeClr val="accent1"/>
+          </a:effectRef>
+          <a:fontRef idx="minor">
+            <a:schemeClr val="lt1"/>
+          </a:fontRef>
+        </p:style>
+        <p:txBody>
+          <a:bodyPr rtlCol="0" anchor="ctr"/>
+          <a:lstStyle/>
+          <a:p>
             <a:pPr algn="ctr"/>
           </a:p>
         </p:txBody>
       </p:sp>
       <p:sp>
         <p:nvSpPr>
-          <p:cNvPr id="7" name="TextBox 6"/>
+          <p:cNvPr id="8" name="Rounded Rectangle 7"/>
+          <p:cNvSpPr/>
+          <p:nvPr/>
+        </p:nvSpPr>
+        <p:spPr>
+          <a:xfrm>
+            <a:off x="731520" y="1143000"/>
+            <a:ext cx="2194560" cy="292608"/>
+          </a:xfrm>
+          <a:prstGeom prst="roundRect">
+            <a:avLst/>
+          </a:prstGeom>
+          <a:solidFill>
+            <a:srgbClr val="F0F9FF"/>
+          </a:solidFill>
+          <a:ln w="12700">
+            <a:solidFill>
+              <a:srgbClr val="BAE6FD"/>
+            </a:solidFill>
+          </a:ln>
+        </p:spPr>
+        <p:style>
+          <a:lnRef idx="1">
+            <a:schemeClr val="accent1"/>
+          </a:lnRef>
+          <a:fillRef idx="3">
+            <a:schemeClr val="accent1"/>
+          </a:fillRef>
+          <a:effectRef idx="2">
+            <a:schemeClr val="accent1"/>
+          </a:effectRef>
+          <a:fontRef idx="minor">
+            <a:schemeClr val="lt1"/>
+          </a:fontRef>
+        </p:style>
+        <p:txBody>
+          <a:bodyPr rtlCol="0" anchor="ctr" wrap="none"/>
+          <a:lstStyle/>
+          <a:p>
+            <a:pPr algn="ctr">
+              <a:defRPr sz="1000" b="1">
+                <a:solidFill>
+                  <a:srgbClr val="0284C7"/>
+                </a:solidFill>
+              </a:defRPr>
+            </a:pPr>
+            <a:r>
+              <a:t>IMPLEMENTATION WORKFLOW</a:t>
+            </a:r>
+          </a:p>
+        </p:txBody>
+      </p:sp>
+      <p:sp>
+        <p:nvSpPr>
+          <p:cNvPr id="9" name="TextBox 8"/>
           <p:cNvSpPr txBox="1"/>
           <p:nvPr/>
         </p:nvSpPr>
         <p:spPr>
           <a:xfrm>
-            <a:off x="6446520" y="1737360"/>
-            <a:ext cx="4800600" cy="4389120"/>
+            <a:off x="731520" y="1508760"/>
+            <a:ext cx="5852160" cy="4754880"/>
           </a:xfrm>
           <a:prstGeom prst="rect">
             <a:avLst/>
@@ -4036,59 +5178,472 @@
           <a:p>
             <a:pPr>
               <a:spcAft>
-                <a:spcPts val="1000"/>
+                <a:spcPts val="400"/>
               </a:spcAft>
-              <a:defRPr sz="1800" b="1">
-                <a:solidFill>
-                  <a:srgbClr val="F59E0B"/>
-                </a:solidFill>
-              </a:defRPr>
-            </a:pPr>
-            <a:r>
-              <a:t>Key Technical Innovations</a:t>
+            </a:pPr>
+            <a:r>
+              <a:rPr b="1" sz="1050">
+                <a:solidFill>
+                  <a:srgbClr val="0284C7"/>
+                </a:solidFill>
+              </a:rPr>
+              <a:t>1. Sector Partition &amp; Launch
+</a:t>
+            </a:r>
+            <a:r>
+              <a:rPr sz="900">
+                <a:solidFill>
+                  <a:srgbClr val="1E293B"/>
+                </a:solidFill>
+              </a:rPr>
+              <a:t>Operator selects 2 km² search polygon on offline tablet; UAV launches in &lt; 3 minutes.
+</a:t>
             </a:r>
           </a:p>
           <a:p>
             <a:pPr>
-              <a:defRPr sz="1300">
+              <a:spcAft>
+                <a:spcPts val="400"/>
+              </a:spcAft>
+            </a:pPr>
+            <a:r>
+              <a:rPr b="1" sz="1050">
+                <a:solidFill>
+                  <a:srgbClr val="0284C7"/>
+                </a:solidFill>
+              </a:rPr>
+              <a:t>2. Autonomous Grid Sweep
+</a:t>
+            </a:r>
+            <a:r>
+              <a:rPr sz="900">
                 <a:solidFill>
                   <a:srgbClr val="1E293B"/>
                 </a:solidFill>
-              </a:defRPr>
-            </a:pPr>
-            <a:r>
-              <a:t>• Dual-Brain Architecture on Single Board:</a:t>
-            </a:r>
-            <a:br/>
-            <a:r>
-              <a:t>  Powered by the Arduino UNO Q integrating the Qualcomm Dragonwing™ QRB2210 Linux MPU with an STM32U585 Real-Time MCU (replaces both flight controller &amp; companion computer in 40g).</a:t>
-            </a:r>
-            <a:br/>
-            <a:br/>
-            <a:r>
-              <a:t>• Sub-5W Edge Deep Learning:</a:t>
-            </a:r>
-            <a:br/>
-            <a:r>
-              <a:t>  INT8-quantized YOLO model running on the Qualcomm NPU; complies with Bouabdallah's 90/10 power rule (actuators consume 90%, compute draws &lt; 10%).</a:t>
-            </a:r>
-            <a:br/>
-            <a:br/>
-            <a:r>
-              <a:t>• Dual-Tier Resilient Telemetry:</a:t>
-            </a:r>
-            <a:br/>
-            <a:r>
-              <a:t>  High-bandwidth Wi-Fi mesh for nearby video + ultra-reliable LoRa (868 MHz) emergency beacon transmitting coordinates over 5+ km.</a:t>
-            </a:r>
-            <a:br/>
-            <a:br/>
-            <a:r>
-              <a:t>• Anti-Compass Drift Heading:</a:t>
-            </a:r>
-            <a:br/>
-            <a:r>
-              <a:t>  Visual-Inertial Odometry overrides magnetometers in steel rubble.</a:t>
+              </a:rPr>
+              <a:t>Executes Boustrophedon lawnmower coverage flight powered by STM32U5 / Zephyr RTOS at 250 Hz.
+</a:t>
+            </a:r>
+          </a:p>
+          <a:p>
+            <a:pPr>
+              <a:spcAft>
+                <a:spcPts val="400"/>
+              </a:spcAft>
+            </a:pPr>
+            <a:r>
+              <a:rPr b="1" sz="1050">
+                <a:solidFill>
+                  <a:srgbClr val="0284C7"/>
+                </a:solidFill>
+              </a:rPr>
+              <a:t>3. Multi-Spectral Perception
+</a:t>
+            </a:r>
+            <a:r>
+              <a:rPr sz="900">
+                <a:solidFill>
+                  <a:srgbClr val="1E293B"/>
+                </a:solidFill>
+              </a:rPr>
+              <a:t>Dual 4K RGB + LWIR Thermal cameras co-register frames; edge YOLO extracts human heat contours.
+</a:t>
+            </a:r>
+          </a:p>
+          <a:p>
+            <a:pPr>
+              <a:spcAft>
+                <a:spcPts val="400"/>
+              </a:spcAft>
+            </a:pPr>
+            <a:r>
+              <a:rPr b="1" sz="1050">
+                <a:solidFill>
+                  <a:srgbClr val="0284C7"/>
+                </a:solidFill>
+              </a:rPr>
+              <a:t>4. Ray-Cast Geolocation
+</a:t>
+            </a:r>
+            <a:r>
+              <a:rPr sz="900">
+                <a:solidFill>
+                  <a:srgbClr val="1E293B"/>
+                </a:solidFill>
+              </a:rPr>
+              <a:t>Tait-Bryan DCM matrix converts bounding box center + LiDAR altitude into real-world Lat/Long.
+</a:t>
+            </a:r>
+          </a:p>
+          <a:p>
+            <a:pPr>
+              <a:spcAft>
+                <a:spcPts val="400"/>
+              </a:spcAft>
+            </a:pPr>
+            <a:r>
+              <a:rPr b="1" sz="1050">
+                <a:solidFill>
+                  <a:srgbClr val="0284C7"/>
+                </a:solidFill>
+              </a:rPr>
+              <a:t>5. Binary LoRa Packet Burst
+</a:t>
+            </a:r>
+            <a:r>
+              <a:rPr sz="900">
+                <a:solidFill>
+                  <a:srgbClr val="1E293B"/>
+                </a:solidFill>
+              </a:rPr>
+              <a:t>Souli et al. (2024) protocol packs survivor coordinates into 17-byte binary frame; broadcasts over 5+ km.
+</a:t>
+            </a:r>
+          </a:p>
+          <a:p>
+            <a:pPr>
+              <a:spcAft>
+                <a:spcPts val="400"/>
+              </a:spcAft>
+            </a:pPr>
+            <a:r>
+              <a:rPr b="1" sz="1050">
+                <a:solidFill>
+                  <a:srgbClr val="0284C7"/>
+                </a:solidFill>
+              </a:rPr>
+              <a:t>6. GCS Triage &amp; Route Planning
+</a:t>
+            </a:r>
+            <a:r>
+              <a:rPr sz="900">
+                <a:solidFill>
+                  <a:srgbClr val="1E293B"/>
+                </a:solidFill>
+              </a:rPr>
+              <a:t>Ground station ranks victims by body temperature urgency; Dijkstra algorithm charts hazard-free ground route.
+</a:t>
+            </a:r>
+          </a:p>
+        </p:txBody>
+      </p:sp>
+      <p:sp>
+        <p:nvSpPr>
+          <p:cNvPr id="10" name="Rounded Rectangle 9"/>
+          <p:cNvSpPr/>
+          <p:nvPr/>
+        </p:nvSpPr>
+        <p:spPr>
+          <a:xfrm>
+            <a:off x="6949440" y="1005840"/>
+            <a:ext cx="4663440" cy="2926080"/>
+          </a:xfrm>
+          <a:prstGeom prst="roundRect">
+            <a:avLst/>
+          </a:prstGeom>
+          <a:solidFill>
+            <a:srgbClr val="FFFFFF"/>
+          </a:solidFill>
+          <a:ln w="15240">
+            <a:solidFill>
+              <a:srgbClr val="E2E8F0"/>
+            </a:solidFill>
+          </a:ln>
+        </p:spPr>
+        <p:style>
+          <a:lnRef idx="1">
+            <a:schemeClr val="accent1"/>
+          </a:lnRef>
+          <a:fillRef idx="3">
+            <a:schemeClr val="accent1"/>
+          </a:fillRef>
+          <a:effectRef idx="2">
+            <a:schemeClr val="accent1"/>
+          </a:effectRef>
+          <a:fontRef idx="minor">
+            <a:schemeClr val="lt1"/>
+          </a:fontRef>
+        </p:style>
+        <p:txBody>
+          <a:bodyPr rtlCol="0" anchor="ctr"/>
+          <a:lstStyle/>
+          <a:p>
+            <a:pPr algn="ctr"/>
+          </a:p>
+        </p:txBody>
+      </p:sp>
+      <p:sp>
+        <p:nvSpPr>
+          <p:cNvPr id="11" name="Rounded Rectangle 10"/>
+          <p:cNvSpPr/>
+          <p:nvPr/>
+        </p:nvSpPr>
+        <p:spPr>
+          <a:xfrm>
+            <a:off x="7132320" y="1143000"/>
+            <a:ext cx="1828800" cy="292608"/>
+          </a:xfrm>
+          <a:prstGeom prst="roundRect">
+            <a:avLst/>
+          </a:prstGeom>
+          <a:solidFill>
+            <a:srgbClr val="F5F3FF"/>
+          </a:solidFill>
+          <a:ln w="12700">
+            <a:solidFill>
+              <a:srgbClr val="DDD6FE"/>
+            </a:solidFill>
+          </a:ln>
+        </p:spPr>
+        <p:style>
+          <a:lnRef idx="1">
+            <a:schemeClr val="accent1"/>
+          </a:lnRef>
+          <a:fillRef idx="3">
+            <a:schemeClr val="accent1"/>
+          </a:fillRef>
+          <a:effectRef idx="2">
+            <a:schemeClr val="accent1"/>
+          </a:effectRef>
+          <a:fontRef idx="minor">
+            <a:schemeClr val="lt1"/>
+          </a:fontRef>
+        </p:style>
+        <p:txBody>
+          <a:bodyPr rtlCol="0" anchor="ctr" wrap="none"/>
+          <a:lstStyle/>
+          <a:p>
+            <a:pPr algn="ctr">
+              <a:defRPr sz="1000" b="1">
+                <a:solidFill>
+                  <a:srgbClr val="7C3AED"/>
+                </a:solidFill>
+              </a:defRPr>
+            </a:pPr>
+            <a:r>
+              <a:t>SYSTEM ARCHITECTURE</a:t>
+            </a:r>
+          </a:p>
+        </p:txBody>
+      </p:sp>
+      <p:sp>
+        <p:nvSpPr>
+          <p:cNvPr id="12" name="TextBox 11"/>
+          <p:cNvSpPr txBox="1"/>
+          <p:nvPr/>
+        </p:nvSpPr>
+        <p:spPr>
+          <a:xfrm>
+            <a:off x="7132320" y="1508760"/>
+            <a:ext cx="4297680" cy="2286000"/>
+          </a:xfrm>
+          <a:prstGeom prst="rect">
+            <a:avLst/>
+          </a:prstGeom>
+          <a:noFill/>
+        </p:spPr>
+        <p:txBody>
+          <a:bodyPr wrap="square">
+            <a:spAutoFit/>
+          </a:bodyPr>
+          <a:lstStyle/>
+          <a:p>
+            <a:pPr>
+              <a:defRPr sz="950">
+                <a:solidFill>
+                  <a:srgbClr val="1E293B"/>
+                </a:solidFill>
+              </a:defRPr>
+            </a:pPr>
+            <a:r>
+              <a:t>Dual-Brain Hardware Split (Arduino UNO Q):</a:t>
+            </a:r>
+            <a:br/>
+            <a:r>
+              <a:t>• Real-Time MCU (STM32U585 / Zephyr RTOS):</a:t>
+            </a:r>
+            <a:br/>
+            <a:r>
+              <a:t>  - 250 Hz (4ms) deterministic flight stabilization loop</a:t>
+            </a:r>
+            <a:br/>
+            <a:r>
+              <a:t>  - 350 Hz PWM direct brushless motor control</a:t>
+            </a:r>
+            <a:br/>
+            <a:r>
+              <a:t>  - IMU (MPU6050) + Barometer (MS5611) + Downward LiDAR</a:t>
+            </a:r>
+            <a:br/>
+            <a:br/>
+            <a:r>
+              <a:t>• Mission Computer (Qualcomm Dragonwing QRB2210 / Linux):</a:t>
+            </a:r>
+            <a:br/>
+            <a:r>
+              <a:t>  - Asynchronous non-blocking RPC bridge (zero flight jitter)</a:t>
+            </a:r>
+            <a:br/>
+            <a:r>
+              <a:t>  - INT8 YOLO Edge AI + Optical-to-Ground Ray-Caster</a:t>
+            </a:r>
+            <a:br/>
+            <a:r>
+              <a:t>  - Semtech SX1262 LoRa Telemetry Driver (868 MHz)</a:t>
+            </a:r>
+          </a:p>
+        </p:txBody>
+      </p:sp>
+      <p:sp>
+        <p:nvSpPr>
+          <p:cNvPr id="13" name="Rounded Rectangle 12"/>
+          <p:cNvSpPr/>
+          <p:nvPr/>
+        </p:nvSpPr>
+        <p:spPr>
+          <a:xfrm>
+            <a:off x="6949440" y="4114800"/>
+            <a:ext cx="4663440" cy="2286000"/>
+          </a:xfrm>
+          <a:prstGeom prst="roundRect">
+            <a:avLst/>
+          </a:prstGeom>
+          <a:solidFill>
+            <a:srgbClr val="FFFFFF"/>
+          </a:solidFill>
+          <a:ln w="15240">
+            <a:solidFill>
+              <a:srgbClr val="E2E8F0"/>
+            </a:solidFill>
+          </a:ln>
+        </p:spPr>
+        <p:style>
+          <a:lnRef idx="1">
+            <a:schemeClr val="accent1"/>
+          </a:lnRef>
+          <a:fillRef idx="3">
+            <a:schemeClr val="accent1"/>
+          </a:fillRef>
+          <a:effectRef idx="2">
+            <a:schemeClr val="accent1"/>
+          </a:effectRef>
+          <a:fontRef idx="minor">
+            <a:schemeClr val="lt1"/>
+          </a:fontRef>
+        </p:style>
+        <p:txBody>
+          <a:bodyPr rtlCol="0" anchor="ctr"/>
+          <a:lstStyle/>
+          <a:p>
+            <a:pPr algn="ctr"/>
+          </a:p>
+        </p:txBody>
+      </p:sp>
+      <p:sp>
+        <p:nvSpPr>
+          <p:cNvPr id="14" name="Rounded Rectangle 13"/>
+          <p:cNvSpPr/>
+          <p:nvPr/>
+        </p:nvSpPr>
+        <p:spPr>
+          <a:xfrm>
+            <a:off x="7132320" y="4251960"/>
+            <a:ext cx="1280160" cy="292608"/>
+          </a:xfrm>
+          <a:prstGeom prst="roundRect">
+            <a:avLst/>
+          </a:prstGeom>
+          <a:solidFill>
+            <a:srgbClr val="F0FDFA"/>
+          </a:solidFill>
+          <a:ln w="12700">
+            <a:solidFill>
+              <a:srgbClr val="99F6E4"/>
+            </a:solidFill>
+          </a:ln>
+        </p:spPr>
+        <p:style>
+          <a:lnRef idx="1">
+            <a:schemeClr val="accent1"/>
+          </a:lnRef>
+          <a:fillRef idx="3">
+            <a:schemeClr val="accent1"/>
+          </a:fillRef>
+          <a:effectRef idx="2">
+            <a:schemeClr val="accent1"/>
+          </a:effectRef>
+          <a:fontRef idx="minor">
+            <a:schemeClr val="lt1"/>
+          </a:fontRef>
+        </p:style>
+        <p:txBody>
+          <a:bodyPr rtlCol="0" anchor="ctr" wrap="none"/>
+          <a:lstStyle/>
+          <a:p>
+            <a:pPr algn="ctr">
+              <a:defRPr sz="1000" b="1">
+                <a:solidFill>
+                  <a:srgbClr val="0D9488"/>
+                </a:solidFill>
+              </a:defRPr>
+            </a:pPr>
+            <a:r>
+              <a:t>TECH STACK</a:t>
+            </a:r>
+          </a:p>
+        </p:txBody>
+      </p:sp>
+      <p:sp>
+        <p:nvSpPr>
+          <p:cNvPr id="15" name="TextBox 14"/>
+          <p:cNvSpPr txBox="1"/>
+          <p:nvPr/>
+        </p:nvSpPr>
+        <p:spPr>
+          <a:xfrm>
+            <a:off x="7132320" y="4617720"/>
+            <a:ext cx="4297680" cy="1645920"/>
+          </a:xfrm>
+          <a:prstGeom prst="rect">
+            <a:avLst/>
+          </a:prstGeom>
+          <a:noFill/>
+        </p:spPr>
+        <p:txBody>
+          <a:bodyPr wrap="square">
+            <a:spAutoFit/>
+          </a:bodyPr>
+          <a:lstStyle/>
+          <a:p>
+            <a:pPr>
+              <a:defRPr sz="950">
+                <a:solidFill>
+                  <a:srgbClr val="1E293B"/>
+                </a:solidFill>
+              </a:defRPr>
+            </a:pPr>
+            <a:r>
+              <a:t>• Flight Stack: Zephyr RTOS, YMFC-32 Core, PX4 Autopilot</a:t>
+            </a:r>
+            <a:br/>
+            <a:r>
+              <a:t>• Edge AI &amp; Vision: Qualcomm SNPE, ONNX Runtime INT8, OpenCV</a:t>
+            </a:r>
+            <a:br/>
+            <a:r>
+              <a:t>• Robotics Middleware: ROS2 Humble, MAVLink v2, micro-ROS</a:t>
+            </a:r>
+            <a:br/>
+            <a:r>
+              <a:t>• Long-Range RF Comms: Semtech SX1262 LoRa P2P (868 MHz)</a:t>
+            </a:r>
+            <a:br/>
+            <a:r>
+              <a:t>• Tactical GCS: React, Leaflet, Tailwind CSS, WebSockets</a:t>
+            </a:r>
+            <a:br/>
+            <a:r>
+              <a:t>• Security: HMAC-SHA256 Telemetry Packet Signatures</a:t>
             </a:r>
           </a:p>
         </p:txBody>
@@ -4113,75 +5668,23 @@
       <p:grpSpPr/>
       <p:sp>
         <p:nvSpPr>
-          <p:cNvPr id="2" name="TextBox 1"/>
-          <p:cNvSpPr txBox="1"/>
-          <p:nvPr/>
-        </p:nvSpPr>
-        <p:spPr>
-          <a:xfrm>
-            <a:off x="731520" y="365760"/>
-            <a:ext cx="10698480" cy="1005840"/>
+          <p:cNvPr id="2" name="Rectangle 1"/>
+          <p:cNvSpPr/>
+          <p:nvPr/>
+        </p:nvSpPr>
+        <p:spPr>
+          <a:xfrm>
+            <a:off x="0" y="0"/>
+            <a:ext cx="12191695" cy="6858000"/>
           </a:xfrm>
           <a:prstGeom prst="rect">
             <a:avLst/>
           </a:prstGeom>
-          <a:noFill/>
-        </p:spPr>
-        <p:txBody>
-          <a:bodyPr wrap="square" lIns="0" tIns="0" rIns="0" bIns="0">
-            <a:spAutoFit/>
-          </a:bodyPr>
-          <a:lstStyle/>
-          <a:p>
-            <a:pPr>
-              <a:spcAft>
-                <a:spcPts val="400"/>
-              </a:spcAft>
-              <a:defRPr sz="1000" b="1">
-                <a:solidFill>
-                  <a:srgbClr val="F59E0B"/>
-                </a:solidFill>
-              </a:defRPr>
-            </a:pPr>
-            <a:r>
-              <a:t>SMART INDIA HACKATHON 2026 | PROBLEM STATEMENT ID: SIH26177</a:t>
-            </a:r>
-          </a:p>
-          <a:p>
-            <a:pPr>
-              <a:defRPr sz="2200" b="1">
-                <a:solidFill>
-                  <a:srgbClr val="0F172A"/>
-                </a:solidFill>
-              </a:defRPr>
-            </a:pPr>
-            <a:r>
-              <a:t>Technical Architecture: The Dual-Brain Edge Pipeline</a:t>
-            </a:r>
-          </a:p>
-        </p:txBody>
-      </p:sp>
-      <p:sp>
-        <p:nvSpPr>
-          <p:cNvPr id="3" name="Rectangle 2"/>
-          <p:cNvSpPr/>
-          <p:nvPr/>
-        </p:nvSpPr>
-        <p:spPr>
-          <a:xfrm>
-            <a:off x="731520" y="1325880"/>
-            <a:ext cx="10698480" cy="36576"/>
-          </a:xfrm>
-          <a:prstGeom prst="rect">
-            <a:avLst/>
-          </a:prstGeom>
           <a:solidFill>
-            <a:srgbClr val="F59E0B"/>
+            <a:srgbClr val="F8FAFC"/>
           </a:solidFill>
           <a:ln>
-            <a:solidFill>
-              <a:srgbClr val="F59E0B"/>
-            </a:solidFill>
+            <a:noFill/>
           </a:ln>
         </p:spPr>
         <p:style>
@@ -4208,14 +5711,14 @@
       </p:sp>
       <p:sp>
         <p:nvSpPr>
-          <p:cNvPr id="4" name="Rounded Rectangle 3"/>
+          <p:cNvPr id="3" name="Rounded Rectangle 2"/>
           <p:cNvSpPr/>
           <p:nvPr/>
         </p:nvSpPr>
         <p:spPr>
           <a:xfrm>
-            <a:off x="731520" y="1554480"/>
-            <a:ext cx="2468880" cy="4754880"/>
+            <a:off x="548640" y="320040"/>
+            <a:ext cx="1645920" cy="502920"/>
           </a:xfrm>
           <a:prstGeom prst="roundRect">
             <a:avLst/>
@@ -4223,7 +5726,7 @@
           <a:solidFill>
             <a:srgbClr val="FFFFFF"/>
           </a:solidFill>
-          <a:ln w="19050">
+          <a:ln w="12700">
             <a:solidFill>
               <a:srgbClr val="E2E8F0"/>
             </a:solidFill>
@@ -4247,20 +5750,29 @@
           <a:bodyPr rtlCol="0" anchor="ctr"/>
           <a:lstStyle/>
           <a:p>
-            <a:pPr algn="ctr"/>
-          </a:p>
-        </p:txBody>
-      </p:sp>
-      <p:sp>
-        <p:nvSpPr>
-          <p:cNvPr id="5" name="TextBox 4"/>
+            <a:pPr algn="ctr">
+              <a:defRPr sz="1300" b="1">
+                <a:solidFill>
+                  <a:srgbClr val="0F172A"/>
+                </a:solidFill>
+              </a:defRPr>
+            </a:pPr>
+            <a:r>
+              <a:t>PHOENIX</a:t>
+            </a:r>
+          </a:p>
+        </p:txBody>
+      </p:sp>
+      <p:sp>
+        <p:nvSpPr>
+          <p:cNvPr id="4" name="TextBox 3"/>
           <p:cNvSpPr txBox="1"/>
           <p:nvPr/>
         </p:nvSpPr>
         <p:spPr>
           <a:xfrm>
-            <a:off x="868680" y="1737360"/>
-            <a:ext cx="2194560" cy="4389120"/>
+            <a:off x="2377440" y="292608"/>
+            <a:ext cx="7315200" cy="594360"/>
           </a:xfrm>
           <a:prstGeom prst="rect">
             <a:avLst/>
@@ -4273,85 +5785,77 @@
           </a:bodyPr>
           <a:lstStyle/>
           <a:p>
-            <a:pPr>
-              <a:spcAft>
-                <a:spcPts val="200"/>
-              </a:spcAft>
-              <a:defRPr sz="1400" b="1">
-                <a:solidFill>
-                  <a:srgbClr val="F59E0B"/>
-                </a:solidFill>
-              </a:defRPr>
-            </a:pPr>
-            <a:r>
-              <a:t>Step 1: Sensing</a:t>
-            </a:r>
-          </a:p>
-          <a:p>
-            <a:pPr>
-              <a:spcAft>
-                <a:spcPts val="800"/>
-              </a:spcAft>
-              <a:defRPr sz="1300" b="1">
+            <a:pPr algn="ctr">
+              <a:defRPr sz="2000" b="1">
                 <a:solidFill>
                   <a:srgbClr val="0F172A"/>
                 </a:solidFill>
               </a:defRPr>
             </a:pPr>
             <a:r>
-              <a:t>Dual-Band Sensor Suite</a:t>
-            </a:r>
-          </a:p>
-          <a:p>
-            <a:pPr>
-              <a:defRPr sz="1150">
-                <a:solidFill>
-                  <a:srgbClr val="1E293B"/>
-                </a:solidFill>
-              </a:defRPr>
-            </a:pPr>
-            <a:r>
-              <a:t>• Sony 4K RGB Camera for terrain context &amp; visual markers.</a:t>
-            </a:r>
-            <a:br/>
-            <a:br/>
-            <a:r>
-              <a:t>• Infiray / FLIR LWIR Thermal Sensor (8-14μm) for human heat anomalies.</a:t>
-            </a:r>
-            <a:br/>
-            <a:br/>
-            <a:r>
-              <a:t>• Downward LiDAR/Sonar for precise ground distance and altitude.</a:t>
-            </a:r>
-            <a:br/>
-            <a:br/>
-            <a:r>
-              <a:t>• Anti-vibration silicone dampening platform.</a:t>
-            </a:r>
-          </a:p>
-        </p:txBody>
-      </p:sp>
-      <p:sp>
-        <p:nvSpPr>
-          <p:cNvPr id="6" name="Rounded Rectangle 5"/>
+              <a:t>Feasibility, Challenges-to-Strategies &amp; Market Viability</a:t>
+            </a:r>
+          </a:p>
+        </p:txBody>
+      </p:sp>
+      <p:sp>
+        <p:nvSpPr>
+          <p:cNvPr id="5" name="TextBox 4"/>
+          <p:cNvSpPr txBox="1"/>
+          <p:nvPr/>
+        </p:nvSpPr>
+        <p:spPr>
+          <a:xfrm>
+            <a:off x="9875520" y="274320"/>
+            <a:ext cx="1828800" cy="594360"/>
+          </a:xfrm>
+          <a:prstGeom prst="rect">
+            <a:avLst/>
+          </a:prstGeom>
+          <a:noFill/>
+        </p:spPr>
+        <p:txBody>
+          <a:bodyPr wrap="none">
+            <a:spAutoFit/>
+          </a:bodyPr>
+          <a:lstStyle/>
+          <a:p>
+            <a:pPr algn="r">
+              <a:defRPr sz="950" b="1">
+                <a:solidFill>
+                  <a:srgbClr val="0F172A"/>
+                </a:solidFill>
+              </a:defRPr>
+            </a:pPr>
+            <a:r>
+              <a:t>SMART INDIA</a:t>
+            </a:r>
+            <a:br/>
+            <a:r>
+              <a:t>HACKATHON 2026</a:t>
+            </a:r>
+          </a:p>
+        </p:txBody>
+      </p:sp>
+      <p:sp>
+        <p:nvSpPr>
+          <p:cNvPr id="6" name="Rectangle 5"/>
           <p:cNvSpPr/>
           <p:nvPr/>
         </p:nvSpPr>
         <p:spPr>
           <a:xfrm>
-            <a:off x="3429000" y="1554480"/>
-            <a:ext cx="2468880" cy="4754880"/>
-          </a:xfrm>
-          <a:prstGeom prst="roundRect">
+            <a:off x="0" y="6537960"/>
+            <a:ext cx="12191695" cy="320040"/>
+          </a:xfrm>
+          <a:prstGeom prst="rect">
             <a:avLst/>
           </a:prstGeom>
           <a:solidFill>
-            <a:srgbClr val="FFFFFF"/>
+            <a:srgbClr val="0F172A"/>
           </a:solidFill>
-          <a:ln w="19050">
-            <a:solidFill>
-              <a:srgbClr val="E2E8F0"/>
-            </a:solidFill>
+          <a:ln>
+            <a:noFill/>
           </a:ln>
         </p:spPr>
         <p:style>
@@ -4372,100 +5876,29 @@
           <a:bodyPr rtlCol="0" anchor="ctr"/>
           <a:lstStyle/>
           <a:p>
-            <a:pPr algn="ctr"/>
-          </a:p>
-        </p:txBody>
-      </p:sp>
-      <p:sp>
-        <p:nvSpPr>
-          <p:cNvPr id="7" name="TextBox 6"/>
-          <p:cNvSpPr txBox="1"/>
-          <p:nvPr/>
-        </p:nvSpPr>
-        <p:spPr>
-          <a:xfrm>
-            <a:off x="3566160" y="1737360"/>
-            <a:ext cx="2194560" cy="4389120"/>
-          </a:xfrm>
-          <a:prstGeom prst="rect">
-            <a:avLst/>
-          </a:prstGeom>
-          <a:noFill/>
-        </p:spPr>
-        <p:txBody>
-          <a:bodyPr wrap="square">
-            <a:spAutoFit/>
-          </a:bodyPr>
-          <a:lstStyle/>
-          <a:p>
-            <a:pPr>
-              <a:spcAft>
-                <a:spcPts val="200"/>
-              </a:spcAft>
-              <a:defRPr sz="1400" b="1">
-                <a:solidFill>
-                  <a:srgbClr val="F59E0B"/>
-                </a:solidFill>
-              </a:defRPr>
-            </a:pPr>
-            <a:r>
-              <a:t>Step 2: Real-Time MCU</a:t>
-            </a:r>
-          </a:p>
-          <a:p>
-            <a:pPr>
-              <a:spcAft>
-                <a:spcPts val="800"/>
-              </a:spcAft>
-              <a:defRPr sz="1300" b="1">
-                <a:solidFill>
-                  <a:srgbClr val="0F172A"/>
-                </a:solidFill>
-              </a:defRPr>
-            </a:pPr>
-            <a:r>
-              <a:t>STM32U585 Core @ 250Hz</a:t>
-            </a:r>
-          </a:p>
-          <a:p>
-            <a:pPr>
-              <a:defRPr sz="1150">
-                <a:solidFill>
-                  <a:srgbClr val="1E293B"/>
-                </a:solidFill>
-              </a:defRPr>
-            </a:pPr>
-            <a:r>
-              <a:t>• Runs Zephyr RTOS with hard-deterministic 4ms PID flight loops.</a:t>
-            </a:r>
-            <a:br/>
-            <a:br/>
-            <a:r>
-              <a:t>• Inherits Joop Broking YMFC-32 flight stabilization heritage.</a:t>
-            </a:r>
-            <a:br/>
-            <a:br/>
-            <a:r>
-              <a:t>• 350Hz patched PWM for direct brushless ESC response.</a:t>
-            </a:r>
-            <a:br/>
-            <a:br/>
-            <a:r>
-              <a:t>• Asynchronous RPC bridge prevents Linux tasks from blocking flight.</a:t>
-            </a:r>
-          </a:p>
-        </p:txBody>
-      </p:sp>
-      <p:sp>
-        <p:nvSpPr>
-          <p:cNvPr id="8" name="Rounded Rectangle 7"/>
+            <a:pPr algn="ctr">
+              <a:defRPr sz="900">
+                <a:solidFill>
+                  <a:srgbClr val="FFFFFF"/>
+                </a:solidFill>
+              </a:defRPr>
+            </a:pPr>
+            <a:r>
+              <a:t>PROJECT PHOENIX: Autonomous Multi-Spectral Edge-AI UAV  |  SIH26177 (Qualcomm Inc.)                                                                   Slide 4</a:t>
+            </a:r>
+          </a:p>
+        </p:txBody>
+      </p:sp>
+      <p:sp>
+        <p:nvSpPr>
+          <p:cNvPr id="7" name="Rounded Rectangle 6"/>
           <p:cNvSpPr/>
           <p:nvPr/>
         </p:nvSpPr>
         <p:spPr>
           <a:xfrm>
-            <a:off x="6126480" y="1554480"/>
-            <a:ext cx="2468880" cy="4754880"/>
+            <a:off x="548640" y="1005840"/>
+            <a:ext cx="3520440" cy="5394960"/>
           </a:xfrm>
           <a:prstGeom prst="roundRect">
             <a:avLst/>
@@ -4473,9 +5906,9 @@
           <a:solidFill>
             <a:srgbClr val="FFFFFF"/>
           </a:solidFill>
-          <a:ln w="19050">
+          <a:ln w="15240">
             <a:solidFill>
-              <a:srgbClr val="E2E8F0"/>
+              <a:srgbClr val="BAE6FD"/>
             </a:solidFill>
           </a:ln>
         </p:spPr>
@@ -4503,104 +5936,24 @@
       </p:sp>
       <p:sp>
         <p:nvSpPr>
-          <p:cNvPr id="9" name="TextBox 8"/>
-          <p:cNvSpPr txBox="1"/>
-          <p:nvPr/>
-        </p:nvSpPr>
-        <p:spPr>
-          <a:xfrm>
-            <a:off x="6263640" y="1737360"/>
-            <a:ext cx="2194560" cy="4389120"/>
-          </a:xfrm>
-          <a:prstGeom prst="rect">
-            <a:avLst/>
-          </a:prstGeom>
-          <a:noFill/>
-        </p:spPr>
-        <p:txBody>
-          <a:bodyPr wrap="square">
-            <a:spAutoFit/>
-          </a:bodyPr>
-          <a:lstStyle/>
-          <a:p>
-            <a:pPr>
-              <a:spcAft>
-                <a:spcPts val="200"/>
-              </a:spcAft>
-              <a:defRPr sz="1400" b="1">
-                <a:solidFill>
-                  <a:srgbClr val="F59E0B"/>
-                </a:solidFill>
-              </a:defRPr>
-            </a:pPr>
-            <a:r>
-              <a:t>Step 3: Edge AI MPU</a:t>
-            </a:r>
-          </a:p>
-          <a:p>
-            <a:pPr>
-              <a:spcAft>
-                <a:spcPts val="800"/>
-              </a:spcAft>
-              <a:defRPr sz="1300" b="1">
-                <a:solidFill>
-                  <a:srgbClr val="0F172A"/>
-                </a:solidFill>
-              </a:defRPr>
-            </a:pPr>
-            <a:r>
-              <a:t>Qualcomm QRB2210 Core</a:t>
-            </a:r>
-          </a:p>
-          <a:p>
-            <a:pPr>
-              <a:defRPr sz="1150">
-                <a:solidFill>
-                  <a:srgbClr val="1E293B"/>
-                </a:solidFill>
-              </a:defRPr>
-            </a:pPr>
-            <a:r>
-              <a:t>• Debian Linux host executing INT8 quantized YOLO-nano.</a:t>
-            </a:r>
-            <a:br/>
-            <a:br/>
-            <a:r>
-              <a:t>• Multi-spectral late fusion: blends RGB confidence with thermal heat.</a:t>
-            </a:r>
-            <a:br/>
-            <a:br/>
-            <a:r>
-              <a:t>• Tait-Bryan Ray-Casting: Calculates victim Lat/Long using drone altitude and gimbal attitude.</a:t>
-            </a:r>
-            <a:br/>
-            <a:br/>
-            <a:r>
-              <a:t>• Sub-5W power draw.</a:t>
-            </a:r>
-          </a:p>
-        </p:txBody>
-      </p:sp>
-      <p:sp>
-        <p:nvSpPr>
-          <p:cNvPr id="10" name="Rounded Rectangle 9"/>
+          <p:cNvPr id="8" name="Rounded Rectangle 7"/>
           <p:cNvSpPr/>
           <p:nvPr/>
         </p:nvSpPr>
         <p:spPr>
           <a:xfrm>
-            <a:off x="8823960" y="1554480"/>
-            <a:ext cx="2468880" cy="4754880"/>
+            <a:off x="731520" y="1143000"/>
+            <a:ext cx="1371600" cy="292608"/>
           </a:xfrm>
           <a:prstGeom prst="roundRect">
             <a:avLst/>
           </a:prstGeom>
           <a:solidFill>
-            <a:srgbClr val="FFFFFF"/>
+            <a:srgbClr val="F0F9FF"/>
           </a:solidFill>
-          <a:ln w="19050">
+          <a:ln w="12700">
             <a:solidFill>
-              <a:srgbClr val="E2E8F0"/>
+              <a:srgbClr val="BAE6FD"/>
             </a:solidFill>
           </a:ln>
         </p:spPr>
@@ -4619,23 +5972,32 @@
           </a:fontRef>
         </p:style>
         <p:txBody>
-          <a:bodyPr rtlCol="0" anchor="ctr"/>
-          <a:lstStyle/>
-          <a:p>
-            <a:pPr algn="ctr"/>
-          </a:p>
-        </p:txBody>
-      </p:sp>
-      <p:sp>
-        <p:nvSpPr>
-          <p:cNvPr id="11" name="TextBox 10"/>
+          <a:bodyPr rtlCol="0" anchor="ctr" wrap="none"/>
+          <a:lstStyle/>
+          <a:p>
+            <a:pPr algn="ctr">
+              <a:defRPr sz="1000" b="1">
+                <a:solidFill>
+                  <a:srgbClr val="0284C7"/>
+                </a:solidFill>
+              </a:defRPr>
+            </a:pPr>
+            <a:r>
+              <a:t>FEASIBILITY</a:t>
+            </a:r>
+          </a:p>
+        </p:txBody>
+      </p:sp>
+      <p:sp>
+        <p:nvSpPr>
+          <p:cNvPr id="9" name="TextBox 8"/>
           <p:cNvSpPr txBox="1"/>
           <p:nvPr/>
         </p:nvSpPr>
         <p:spPr>
           <a:xfrm>
-            <a:off x="8961120" y="1737360"/>
-            <a:ext cx="2194560" cy="4389120"/>
+            <a:off x="731520" y="1554480"/>
+            <a:ext cx="3154680" cy="4754880"/>
           </a:xfrm>
           <a:prstGeom prst="rect">
             <a:avLst/>
@@ -4649,59 +6011,382 @@
           <a:lstStyle/>
           <a:p>
             <a:pPr>
-              <a:spcAft>
-                <a:spcPts val="200"/>
-              </a:spcAft>
-              <a:defRPr sz="1400" b="1">
-                <a:solidFill>
-                  <a:srgbClr val="F59E0B"/>
-                </a:solidFill>
-              </a:defRPr>
-            </a:pPr>
-            <a:r>
-              <a:t>Step 4: Tactical GCS</a:t>
-            </a:r>
-          </a:p>
+              <a:defRPr sz="950">
+                <a:solidFill>
+                  <a:srgbClr val="1E293B"/>
+                </a:solidFill>
+              </a:defRPr>
+            </a:pPr>
+            <a:r>
+              <a:t>TECHNICAL FEASIBILITY</a:t>
+            </a:r>
+            <a:br/>
+            <a:r>
+              <a:t>• Bouabdallah Sizing Laws: 38% battery mass fraction, β ≥ 2.0 thrust-to-weight ratio.</a:t>
+            </a:r>
+            <a:br/>
+            <a:r>
+              <a:t>• Total All-Up-Weight: 1.58 kg (Comfortably under DGCA 2.0 kg Micro Category).</a:t>
+            </a:r>
+            <a:br/>
+            <a:r>
+              <a:t>• Sub-5W Compute: Qualcomm NPU preserves 90% power for rotor propulsion.</a:t>
+            </a:r>
+            <a:br/>
+            <a:br/>
+            <a:r>
+              <a:t>OPERATIONAL FEASIBILITY</a:t>
+            </a:r>
+            <a:br/>
+            <a:r>
+              <a:t>• Setup Time: &lt; 3 minutes from rugged backpack unboxing to flight.</a:t>
+            </a:r>
+            <a:br/>
+            <a:r>
+              <a:t>• Quick-Swap Battery: Dual 4S LiPo tray for continuous sortie coverage.</a:t>
+            </a:r>
+            <a:br/>
+            <a:br/>
+            <a:r>
+              <a:t>FINANCIAL FEASIBILITY</a:t>
+            </a:r>
+            <a:br/>
+            <a:r>
+              <a:t>• Bill of Materials: ₹85,000 – ₹1,40,000 per operational unit (1/8th of commercial enterprise drones).</a:t>
+            </a:r>
+          </a:p>
+        </p:txBody>
+      </p:sp>
+      <p:sp>
+        <p:nvSpPr>
+          <p:cNvPr id="10" name="Rounded Rectangle 9"/>
+          <p:cNvSpPr/>
+          <p:nvPr/>
+        </p:nvSpPr>
+        <p:spPr>
+          <a:xfrm>
+            <a:off x="4343400" y="1005840"/>
+            <a:ext cx="3520440" cy="5394960"/>
+          </a:xfrm>
+          <a:prstGeom prst="roundRect">
+            <a:avLst/>
+          </a:prstGeom>
+          <a:solidFill>
+            <a:srgbClr val="FFFFFF"/>
+          </a:solidFill>
+          <a:ln w="15240">
+            <a:solidFill>
+              <a:srgbClr val="DDD6FE"/>
+            </a:solidFill>
+          </a:ln>
+        </p:spPr>
+        <p:style>
+          <a:lnRef idx="1">
+            <a:schemeClr val="accent1"/>
+          </a:lnRef>
+          <a:fillRef idx="3">
+            <a:schemeClr val="accent1"/>
+          </a:fillRef>
+          <a:effectRef idx="2">
+            <a:schemeClr val="accent1"/>
+          </a:effectRef>
+          <a:fontRef idx="minor">
+            <a:schemeClr val="lt1"/>
+          </a:fontRef>
+        </p:style>
+        <p:txBody>
+          <a:bodyPr rtlCol="0" anchor="ctr"/>
+          <a:lstStyle/>
+          <a:p>
+            <a:pPr algn="ctr"/>
+          </a:p>
+        </p:txBody>
+      </p:sp>
+      <p:sp>
+        <p:nvSpPr>
+          <p:cNvPr id="11" name="Rounded Rectangle 10"/>
+          <p:cNvSpPr/>
+          <p:nvPr/>
+        </p:nvSpPr>
+        <p:spPr>
+          <a:xfrm>
+            <a:off x="4526280" y="1143000"/>
+            <a:ext cx="2011680" cy="292608"/>
+          </a:xfrm>
+          <a:prstGeom prst="roundRect">
+            <a:avLst/>
+          </a:prstGeom>
+          <a:solidFill>
+            <a:srgbClr val="F5F3FF"/>
+          </a:solidFill>
+          <a:ln w="12700">
+            <a:solidFill>
+              <a:srgbClr val="DDD6FE"/>
+            </a:solidFill>
+          </a:ln>
+        </p:spPr>
+        <p:style>
+          <a:lnRef idx="1">
+            <a:schemeClr val="accent1"/>
+          </a:lnRef>
+          <a:fillRef idx="3">
+            <a:schemeClr val="accent1"/>
+          </a:fillRef>
+          <a:effectRef idx="2">
+            <a:schemeClr val="accent1"/>
+          </a:effectRef>
+          <a:fontRef idx="minor">
+            <a:schemeClr val="lt1"/>
+          </a:fontRef>
+        </p:style>
+        <p:txBody>
+          <a:bodyPr rtlCol="0" anchor="ctr" wrap="none"/>
+          <a:lstStyle/>
+          <a:p>
+            <a:pPr algn="ctr">
+              <a:defRPr sz="1000" b="1">
+                <a:solidFill>
+                  <a:srgbClr val="7C3AED"/>
+                </a:solidFill>
+              </a:defRPr>
+            </a:pPr>
+            <a:r>
+              <a:t>CHALLENGES ➔ STRATEGIES</a:t>
+            </a:r>
+          </a:p>
+        </p:txBody>
+      </p:sp>
+      <p:sp>
+        <p:nvSpPr>
+          <p:cNvPr id="12" name="TextBox 11"/>
+          <p:cNvSpPr txBox="1"/>
+          <p:nvPr/>
+        </p:nvSpPr>
+        <p:spPr>
+          <a:xfrm>
+            <a:off x="4526280" y="1554480"/>
+            <a:ext cx="3154680" cy="4754880"/>
+          </a:xfrm>
+          <a:prstGeom prst="rect">
+            <a:avLst/>
+          </a:prstGeom>
+          <a:noFill/>
+        </p:spPr>
+        <p:txBody>
+          <a:bodyPr wrap="square">
+            <a:spAutoFit/>
+          </a:bodyPr>
+          <a:lstStyle/>
           <a:p>
             <a:pPr>
-              <a:spcAft>
-                <a:spcPts val="800"/>
-              </a:spcAft>
-              <a:defRPr sz="1300" b="1">
-                <a:solidFill>
-                  <a:srgbClr val="0F172A"/>
-                </a:solidFill>
-              </a:defRPr>
-            </a:pPr>
-            <a:r>
-              <a:t>Offline Ground Station</a:t>
-            </a:r>
-          </a:p>
+              <a:defRPr sz="950">
+                <a:solidFill>
+                  <a:srgbClr val="1E293B"/>
+                </a:solidFill>
+              </a:defRPr>
+            </a:pPr>
+            <a:r>
+              <a:t>1. Comms Blackout in Canyons</a:t>
+            </a:r>
+            <a:br/>
+            <a:r>
+              <a:t>   ➔ Strategy: Raw LoRa P2P 868MHz packet burst (Souli et al., Elsevier 2024).</a:t>
+            </a:r>
+            <a:br/>
+            <a:br/>
+            <a:r>
+              <a:t>2. Smoke, Mud Slush &amp; Darkness</a:t>
+            </a:r>
+            <a:br/>
+            <a:r>
+              <a:t>   ➔ Strategy: Dual-band 8-14μm LWIR Thermal fusion spots living 37°C body heat.</a:t>
+            </a:r>
+            <a:br/>
+            <a:br/>
+            <a:r>
+              <a:t>3. Rubble Steel Magnetometer Distortion</a:t>
+            </a:r>
+            <a:br/>
+            <a:r>
+              <a:t>   ➔ Strategy: Visual Inertial Odometry (VIO) overrides compass in magnetic fields.</a:t>
+            </a:r>
+            <a:br/>
+            <a:br/>
+            <a:r>
+              <a:t>4. Propeller Vibration Sensor Noise</a:t>
+            </a:r>
+            <a:br/>
+            <a:r>
+              <a:t>   ➔ Strategy: Zero-pitching-moment airfoils (NASA TM-4741) + silicone mounts.</a:t>
+            </a:r>
+            <a:br/>
+            <a:br/>
+            <a:r>
+              <a:t>5. Actuator Saturation in Gusts</a:t>
+            </a:r>
+            <a:br/>
+            <a:r>
+              <a:t>   ➔ Strategy: Anti-windup integrator clamping (Bouabdallah Algorithm 2).</a:t>
+            </a:r>
+          </a:p>
+        </p:txBody>
+      </p:sp>
+      <p:sp>
+        <p:nvSpPr>
+          <p:cNvPr id="13" name="Rounded Rectangle 12"/>
+          <p:cNvSpPr/>
+          <p:nvPr/>
+        </p:nvSpPr>
+        <p:spPr>
+          <a:xfrm>
+            <a:off x="8138160" y="1005840"/>
+            <a:ext cx="3520440" cy="5394960"/>
+          </a:xfrm>
+          <a:prstGeom prst="roundRect">
+            <a:avLst/>
+          </a:prstGeom>
+          <a:solidFill>
+            <a:srgbClr val="FFFFFF"/>
+          </a:solidFill>
+          <a:ln w="15240">
+            <a:solidFill>
+              <a:srgbClr val="99F6E4"/>
+            </a:solidFill>
+          </a:ln>
+        </p:spPr>
+        <p:style>
+          <a:lnRef idx="1">
+            <a:schemeClr val="accent1"/>
+          </a:lnRef>
+          <a:fillRef idx="3">
+            <a:schemeClr val="accent1"/>
+          </a:fillRef>
+          <a:effectRef idx="2">
+            <a:schemeClr val="accent1"/>
+          </a:effectRef>
+          <a:fontRef idx="minor">
+            <a:schemeClr val="lt1"/>
+          </a:fontRef>
+        </p:style>
+        <p:txBody>
+          <a:bodyPr rtlCol="0" anchor="ctr"/>
+          <a:lstStyle/>
+          <a:p>
+            <a:pPr algn="ctr"/>
+          </a:p>
+        </p:txBody>
+      </p:sp>
+      <p:sp>
+        <p:nvSpPr>
+          <p:cNvPr id="14" name="Rounded Rectangle 13"/>
+          <p:cNvSpPr/>
+          <p:nvPr/>
+        </p:nvSpPr>
+        <p:spPr>
+          <a:xfrm>
+            <a:off x="8321040" y="1143000"/>
+            <a:ext cx="1280160" cy="292608"/>
+          </a:xfrm>
+          <a:prstGeom prst="roundRect">
+            <a:avLst/>
+          </a:prstGeom>
+          <a:solidFill>
+            <a:srgbClr val="F0FDFA"/>
+          </a:solidFill>
+          <a:ln w="12700">
+            <a:solidFill>
+              <a:srgbClr val="99F6E4"/>
+            </a:solidFill>
+          </a:ln>
+        </p:spPr>
+        <p:style>
+          <a:lnRef idx="1">
+            <a:schemeClr val="accent1"/>
+          </a:lnRef>
+          <a:fillRef idx="3">
+            <a:schemeClr val="accent1"/>
+          </a:fillRef>
+          <a:effectRef idx="2">
+            <a:schemeClr val="accent1"/>
+          </a:effectRef>
+          <a:fontRef idx="minor">
+            <a:schemeClr val="lt1"/>
+          </a:fontRef>
+        </p:style>
+        <p:txBody>
+          <a:bodyPr rtlCol="0" anchor="ctr" wrap="none"/>
+          <a:lstStyle/>
+          <a:p>
+            <a:pPr algn="ctr">
+              <a:defRPr sz="1000" b="1">
+                <a:solidFill>
+                  <a:srgbClr val="0D9488"/>
+                </a:solidFill>
+              </a:defRPr>
+            </a:pPr>
+            <a:r>
+              <a:t>VIABILITY</a:t>
+            </a:r>
+          </a:p>
+        </p:txBody>
+      </p:sp>
+      <p:sp>
+        <p:nvSpPr>
+          <p:cNvPr id="15" name="TextBox 14"/>
+          <p:cNvSpPr txBox="1"/>
+          <p:nvPr/>
+        </p:nvSpPr>
+        <p:spPr>
+          <a:xfrm>
+            <a:off x="8321040" y="1554480"/>
+            <a:ext cx="3154680" cy="4754880"/>
+          </a:xfrm>
+          <a:prstGeom prst="rect">
+            <a:avLst/>
+          </a:prstGeom>
+          <a:noFill/>
+        </p:spPr>
+        <p:txBody>
+          <a:bodyPr wrap="square">
+            <a:spAutoFit/>
+          </a:bodyPr>
+          <a:lstStyle/>
           <a:p>
             <a:pPr>
-              <a:defRPr sz="1150">
+              <a:defRPr sz="950">
                 <a:solidFill>
                   <a:srgbClr val="1E293B"/>
                 </a:solidFill>
               </a:defRPr>
             </a:pPr>
             <a:r>
-              <a:t>• Dual comms: Local Wi-Fi video stream + LoRa 868MHz packet telemetry.</a:t>
-            </a:r>
-            <a:br/>
-            <a:br/>
-            <a:r>
-              <a:t>• Offline vector disaster mapping (Leaflet / Mapbox tiles).</a:t>
-            </a:r>
-            <a:br/>
-            <a:br/>
-            <a:r>
-              <a:t>• Automated Triage Queue (coordinates, confidence, heat).</a:t>
-            </a:r>
-            <a:br/>
-            <a:br/>
-            <a:r>
-              <a:t>• Dijkstra safe-path routing for ground search crews.</a:t>
+              <a:t>ECONOMIC VIABILITY</a:t>
+            </a:r>
+            <a:br/>
+            <a:r>
+              <a:t>• Enterprise Drone Disruption: DJI Matrice 30T costs ₹12-14 Lakhs. Phoenix costs ₹1.2 Lakh.</a:t>
+            </a:r>
+            <a:br/>
+            <a:r>
+              <a:t>• Fleet Scalability: 1 NDRF battalion can deploy a swarm of 5 Phoenix UAVs for the price of 1 commercial drone.</a:t>
+            </a:r>
+            <a:br/>
+            <a:br/>
+            <a:r>
+              <a:t>NATIONAL DATA SOVEREIGNTY</a:t>
+            </a:r>
+            <a:br/>
+            <a:r>
+              <a:t>• 100% Air-Gapped: Zero telemetry leaked to foreign cloud servers; adheres to Indian Defense &amp; Home Ministry cyber norms.</a:t>
+            </a:r>
+            <a:br/>
+            <a:br/>
+            <a:r>
+              <a:t>DEPLOYMENT ECOSYSTEM</a:t>
+            </a:r>
+            <a:br/>
+            <a:r>
+              <a:t>• Seamless integration into state disaster management authorities (NDRF, SDRF, Indian Army disaster columns).</a:t>
             </a:r>
           </a:p>
         </p:txBody>
@@ -4726,75 +6411,23 @@
       <p:grpSpPr/>
       <p:sp>
         <p:nvSpPr>
-          <p:cNvPr id="2" name="TextBox 1"/>
-          <p:cNvSpPr txBox="1"/>
-          <p:nvPr/>
-        </p:nvSpPr>
-        <p:spPr>
-          <a:xfrm>
-            <a:off x="731520" y="365760"/>
-            <a:ext cx="10698480" cy="1005840"/>
+          <p:cNvPr id="2" name="Rectangle 1"/>
+          <p:cNvSpPr/>
+          <p:nvPr/>
+        </p:nvSpPr>
+        <p:spPr>
+          <a:xfrm>
+            <a:off x="0" y="0"/>
+            <a:ext cx="12191695" cy="6858000"/>
           </a:xfrm>
           <a:prstGeom prst="rect">
             <a:avLst/>
           </a:prstGeom>
-          <a:noFill/>
-        </p:spPr>
-        <p:txBody>
-          <a:bodyPr wrap="square" lIns="0" tIns="0" rIns="0" bIns="0">
-            <a:spAutoFit/>
-          </a:bodyPr>
-          <a:lstStyle/>
-          <a:p>
-            <a:pPr>
-              <a:spcAft>
-                <a:spcPts val="400"/>
-              </a:spcAft>
-              <a:defRPr sz="1000" b="1">
-                <a:solidFill>
-                  <a:srgbClr val="F59E0B"/>
-                </a:solidFill>
-              </a:defRPr>
-            </a:pPr>
-            <a:r>
-              <a:t>SMART INDIA HACKATHON 2026 | PROBLEM STATEMENT ID: SIH26177</a:t>
-            </a:r>
-          </a:p>
-          <a:p>
-            <a:pPr>
-              <a:defRPr sz="2200" b="1">
-                <a:solidFill>
-                  <a:srgbClr val="0F172A"/>
-                </a:solidFill>
-              </a:defRPr>
-            </a:pPr>
-            <a:r>
-              <a:t>Engineering Feasibility &amp; Commercial Viability</a:t>
-            </a:r>
-          </a:p>
-        </p:txBody>
-      </p:sp>
-      <p:sp>
-        <p:nvSpPr>
-          <p:cNvPr id="3" name="Rectangle 2"/>
-          <p:cNvSpPr/>
-          <p:nvPr/>
-        </p:nvSpPr>
-        <p:spPr>
-          <a:xfrm>
-            <a:off x="731520" y="1325880"/>
-            <a:ext cx="10698480" cy="36576"/>
-          </a:xfrm>
-          <a:prstGeom prst="rect">
-            <a:avLst/>
-          </a:prstGeom>
           <a:solidFill>
-            <a:srgbClr val="F59E0B"/>
+            <a:srgbClr val="F8FAFC"/>
           </a:solidFill>
           <a:ln>
-            <a:solidFill>
-              <a:srgbClr val="F59E0B"/>
-            </a:solidFill>
+            <a:noFill/>
           </a:ln>
         </p:spPr>
         <p:style>
@@ -4821,14 +6454,14 @@
       </p:sp>
       <p:sp>
         <p:nvSpPr>
-          <p:cNvPr id="4" name="Rounded Rectangle 3"/>
+          <p:cNvPr id="3" name="Rounded Rectangle 2"/>
           <p:cNvSpPr/>
           <p:nvPr/>
         </p:nvSpPr>
         <p:spPr>
           <a:xfrm>
-            <a:off x="731520" y="1554480"/>
-            <a:ext cx="5166360" cy="4754880"/>
+            <a:off x="548640" y="320040"/>
+            <a:ext cx="1645920" cy="502920"/>
           </a:xfrm>
           <a:prstGeom prst="roundRect">
             <a:avLst/>
@@ -4836,7 +6469,7 @@
           <a:solidFill>
             <a:srgbClr val="FFFFFF"/>
           </a:solidFill>
-          <a:ln w="19050">
+          <a:ln w="12700">
             <a:solidFill>
               <a:srgbClr val="E2E8F0"/>
             </a:solidFill>
@@ -4860,20 +6493,29 @@
           <a:bodyPr rtlCol="0" anchor="ctr"/>
           <a:lstStyle/>
           <a:p>
-            <a:pPr algn="ctr"/>
-          </a:p>
-        </p:txBody>
-      </p:sp>
-      <p:sp>
-        <p:nvSpPr>
-          <p:cNvPr id="5" name="TextBox 4"/>
+            <a:pPr algn="ctr">
+              <a:defRPr sz="1300" b="1">
+                <a:solidFill>
+                  <a:srgbClr val="0F172A"/>
+                </a:solidFill>
+              </a:defRPr>
+            </a:pPr>
+            <a:r>
+              <a:t>PHOENIX</a:t>
+            </a:r>
+          </a:p>
+        </p:txBody>
+      </p:sp>
+      <p:sp>
+        <p:nvSpPr>
+          <p:cNvPr id="4" name="TextBox 3"/>
           <p:cNvSpPr txBox="1"/>
           <p:nvPr/>
         </p:nvSpPr>
         <p:spPr>
           <a:xfrm>
-            <a:off x="914400" y="1737360"/>
-            <a:ext cx="4800600" cy="4389120"/>
+            <a:off x="2377440" y="292608"/>
+            <a:ext cx="7315200" cy="594360"/>
           </a:xfrm>
           <a:prstGeom prst="rect">
             <a:avLst/>
@@ -4886,90 +6528,77 @@
           </a:bodyPr>
           <a:lstStyle/>
           <a:p>
-            <a:pPr>
-              <a:spcAft>
-                <a:spcPts val="800"/>
-              </a:spcAft>
-              <a:defRPr sz="1600" b="1">
+            <a:pPr algn="ctr">
+              <a:defRPr sz="2000" b="1">
                 <a:solidFill>
                   <a:srgbClr val="0F172A"/>
                 </a:solidFill>
               </a:defRPr>
             </a:pPr>
             <a:r>
-              <a:t>Mathematical Sizing (Bouabdallah Sizing Laws)</a:t>
-            </a:r>
-          </a:p>
-          <a:p>
-            <a:pPr>
-              <a:defRPr sz="1250">
-                <a:solidFill>
-                  <a:srgbClr val="1E293B"/>
-                </a:solidFill>
-              </a:defRPr>
-            </a:pPr>
-            <a:r>
-              <a:t>• Thrust-to-Weight Ratio: β ≥ 2.0 (50% thrust margin for turbulence, heavy wind, and evasive climb in disaster zones).</a:t>
-            </a:r>
-            <a:br/>
-            <a:br/>
-            <a:r>
-              <a:t>• 38% Battery Mass Fraction: Sized via Bouabdallah's Cost Factor (C) and Autonomy (Au) optimization; prevents payload-diminishing returns.</a:t>
-            </a:r>
-            <a:br/>
-            <a:br/>
-            <a:r>
-              <a:t>• Weight Budget (Under DGCA 2kg Micro Limit):</a:t>
-            </a:r>
-            <a:br/>
-            <a:r>
-              <a:t>  - Airframe &amp; 4x BLDC Motors + Props: 720g</a:t>
-            </a:r>
-            <a:br/>
-            <a:r>
-              <a:t>  - Battery (4S 5200mAh LiPo): 560g</a:t>
-            </a:r>
-            <a:br/>
-            <a:r>
-              <a:t>  - Dual-Brain Avionics (UNO Q + Sensors): 120g</a:t>
-            </a:r>
-            <a:br/>
-            <a:r>
-              <a:t>  - Dual-Camera Gimbal Payload: 180g</a:t>
-            </a:r>
-            <a:br/>
-            <a:r>
-              <a:t>  - Total All-Up-Weight (AUW): 1.58 kg (&lt; 2.0 kg Micro Category)</a:t>
-            </a:r>
-            <a:br/>
-            <a:br/>
-            <a:r>
-              <a:t>• 30-Minute Search Window: Covers 1.5 km² grid per battery sortie.</a:t>
-            </a:r>
-          </a:p>
-        </p:txBody>
-      </p:sp>
-      <p:sp>
-        <p:nvSpPr>
-          <p:cNvPr id="6" name="Rounded Rectangle 5"/>
+              <a:t>Mission Impact &amp; Multi-Stakeholder Benefits</a:t>
+            </a:r>
+          </a:p>
+        </p:txBody>
+      </p:sp>
+      <p:sp>
+        <p:nvSpPr>
+          <p:cNvPr id="5" name="TextBox 4"/>
+          <p:cNvSpPr txBox="1"/>
+          <p:nvPr/>
+        </p:nvSpPr>
+        <p:spPr>
+          <a:xfrm>
+            <a:off x="9875520" y="274320"/>
+            <a:ext cx="1828800" cy="594360"/>
+          </a:xfrm>
+          <a:prstGeom prst="rect">
+            <a:avLst/>
+          </a:prstGeom>
+          <a:noFill/>
+        </p:spPr>
+        <p:txBody>
+          <a:bodyPr wrap="none">
+            <a:spAutoFit/>
+          </a:bodyPr>
+          <a:lstStyle/>
+          <a:p>
+            <a:pPr algn="r">
+              <a:defRPr sz="950" b="1">
+                <a:solidFill>
+                  <a:srgbClr val="0F172A"/>
+                </a:solidFill>
+              </a:defRPr>
+            </a:pPr>
+            <a:r>
+              <a:t>SMART INDIA</a:t>
+            </a:r>
+            <a:br/>
+            <a:r>
+              <a:t>HACKATHON 2026</a:t>
+            </a:r>
+          </a:p>
+        </p:txBody>
+      </p:sp>
+      <p:sp>
+        <p:nvSpPr>
+          <p:cNvPr id="6" name="Rectangle 5"/>
           <p:cNvSpPr/>
           <p:nvPr/>
         </p:nvSpPr>
         <p:spPr>
           <a:xfrm>
-            <a:off x="6263640" y="1554480"/>
-            <a:ext cx="5166360" cy="4754880"/>
-          </a:xfrm>
-          <a:prstGeom prst="roundRect">
+            <a:off x="0" y="6537960"/>
+            <a:ext cx="12191695" cy="320040"/>
+          </a:xfrm>
+          <a:prstGeom prst="rect">
             <a:avLst/>
           </a:prstGeom>
           <a:solidFill>
-            <a:srgbClr val="FFFFFF"/>
+            <a:srgbClr val="0F172A"/>
           </a:solidFill>
-          <a:ln w="19050">
-            <a:solidFill>
-              <a:srgbClr val="E2E8F0"/>
-            </a:solidFill>
+          <a:ln>
+            <a:noFill/>
           </a:ln>
         </p:spPr>
         <p:style>
@@ -4990,20 +6619,128 @@
           <a:bodyPr rtlCol="0" anchor="ctr"/>
           <a:lstStyle/>
           <a:p>
+            <a:pPr algn="ctr">
+              <a:defRPr sz="900">
+                <a:solidFill>
+                  <a:srgbClr val="FFFFFF"/>
+                </a:solidFill>
+              </a:defRPr>
+            </a:pPr>
+            <a:r>
+              <a:t>PROJECT PHOENIX: Autonomous Multi-Spectral Edge-AI UAV  |  SIH26177 (Qualcomm Inc.)                                                                   Slide 5</a:t>
+            </a:r>
+          </a:p>
+        </p:txBody>
+      </p:sp>
+      <p:sp>
+        <p:nvSpPr>
+          <p:cNvPr id="7" name="Rounded Rectangle 6"/>
+          <p:cNvSpPr/>
+          <p:nvPr/>
+        </p:nvSpPr>
+        <p:spPr>
+          <a:xfrm>
+            <a:off x="548640" y="1005840"/>
+            <a:ext cx="2560320" cy="3749039"/>
+          </a:xfrm>
+          <a:prstGeom prst="roundRect">
+            <a:avLst/>
+          </a:prstGeom>
+          <a:solidFill>
+            <a:srgbClr val="FFFFFF"/>
+          </a:solidFill>
+          <a:ln w="15240">
+            <a:solidFill>
+              <a:srgbClr val="99F6E4"/>
+            </a:solidFill>
+          </a:ln>
+        </p:spPr>
+        <p:style>
+          <a:lnRef idx="1">
+            <a:schemeClr val="accent1"/>
+          </a:lnRef>
+          <a:fillRef idx="3">
+            <a:schemeClr val="accent1"/>
+          </a:fillRef>
+          <a:effectRef idx="2">
+            <a:schemeClr val="accent1"/>
+          </a:effectRef>
+          <a:fontRef idx="minor">
+            <a:schemeClr val="lt1"/>
+          </a:fontRef>
+        </p:style>
+        <p:txBody>
+          <a:bodyPr rtlCol="0" anchor="ctr"/>
+          <a:lstStyle/>
+          <a:p>
             <a:pPr algn="ctr"/>
           </a:p>
         </p:txBody>
       </p:sp>
       <p:sp>
         <p:nvSpPr>
-          <p:cNvPr id="7" name="TextBox 6"/>
+          <p:cNvPr id="8" name="Rounded Rectangle 7"/>
+          <p:cNvSpPr/>
+          <p:nvPr/>
+        </p:nvSpPr>
+        <p:spPr>
+          <a:xfrm>
+            <a:off x="685800" y="1143000"/>
+            <a:ext cx="2286000" cy="292608"/>
+          </a:xfrm>
+          <a:prstGeom prst="roundRect">
+            <a:avLst/>
+          </a:prstGeom>
+          <a:solidFill>
+            <a:srgbClr val="F0FDFA"/>
+          </a:solidFill>
+          <a:ln w="12700">
+            <a:solidFill>
+              <a:srgbClr val="99F6E4"/>
+            </a:solidFill>
+          </a:ln>
+        </p:spPr>
+        <p:style>
+          <a:lnRef idx="1">
+            <a:schemeClr val="accent1"/>
+          </a:lnRef>
+          <a:fillRef idx="3">
+            <a:schemeClr val="accent1"/>
+          </a:fillRef>
+          <a:effectRef idx="2">
+            <a:schemeClr val="accent1"/>
+          </a:effectRef>
+          <a:fontRef idx="minor">
+            <a:schemeClr val="lt1"/>
+          </a:fontRef>
+        </p:style>
+        <p:txBody>
+          <a:bodyPr rtlCol="0" anchor="ctr" wrap="none"/>
+          <a:lstStyle/>
+          <a:p>
+            <a:pPr algn="ctr">
+              <a:defRPr sz="1000" b="1">
+                <a:solidFill>
+                  <a:srgbClr val="0D9488"/>
+                </a:solidFill>
+              </a:defRPr>
+            </a:pPr>
+            <a:r>
+              <a:t>TRAPPED VICTIMS</a:t>
+            </a:r>
+          </a:p>
+        </p:txBody>
+      </p:sp>
+      <p:sp>
+        <p:nvSpPr>
+          <p:cNvPr id="9" name="TextBox 8"/>
           <p:cNvSpPr txBox="1"/>
           <p:nvPr/>
         </p:nvSpPr>
         <p:spPr>
           <a:xfrm>
-            <a:off x="6446520" y="1737360"/>
-            <a:ext cx="4800600" cy="4389120"/>
+            <a:off x="685800" y="1600200"/>
+            <a:ext cx="2286000" cy="3063239"/>
           </a:xfrm>
           <a:prstGeom prst="rect">
             <a:avLst/>
@@ -5017,66 +6754,598 @@
           <a:lstStyle/>
           <a:p>
             <a:pPr>
-              <a:spcAft>
-                <a:spcPts val="800"/>
-              </a:spcAft>
-              <a:defRPr sz="1600" b="1">
-                <a:solidFill>
-                  <a:srgbClr val="2563EB"/>
-                </a:solidFill>
-              </a:defRPr>
-            </a:pPr>
-            <a:r>
-              <a:t>Market &amp; Cost Viability Comparison</a:t>
-            </a:r>
-          </a:p>
+              <a:defRPr sz="1000">
+                <a:solidFill>
+                  <a:srgbClr val="1E293B"/>
+                </a:solidFill>
+              </a:defRPr>
+            </a:pPr>
+            <a:r>
+              <a:t>• Located in Golden 72h window</a:t>
+            </a:r>
+            <a:br/>
+            <a:r>
+              <a:t>• Discovered through mud &amp; debris</a:t>
+            </a:r>
+            <a:br/>
+            <a:r>
+              <a:t>• Rapid medical triage prioritization</a:t>
+            </a:r>
+            <a:br/>
+            <a:r>
+              <a:t>• Maximized chances of survival</a:t>
+            </a:r>
+          </a:p>
+        </p:txBody>
+      </p:sp>
+      <p:sp>
+        <p:nvSpPr>
+          <p:cNvPr id="10" name="Rounded Rectangle 9"/>
+          <p:cNvSpPr/>
+          <p:nvPr/>
+        </p:nvSpPr>
+        <p:spPr>
+          <a:xfrm>
+            <a:off x="3337560" y="1005840"/>
+            <a:ext cx="2560320" cy="3749039"/>
+          </a:xfrm>
+          <a:prstGeom prst="roundRect">
+            <a:avLst/>
+          </a:prstGeom>
+          <a:solidFill>
+            <a:srgbClr val="FFFFFF"/>
+          </a:solidFill>
+          <a:ln w="15240">
+            <a:solidFill>
+              <a:srgbClr val="BAE6FD"/>
+            </a:solidFill>
+          </a:ln>
+        </p:spPr>
+        <p:style>
+          <a:lnRef idx="1">
+            <a:schemeClr val="accent1"/>
+          </a:lnRef>
+          <a:fillRef idx="3">
+            <a:schemeClr val="accent1"/>
+          </a:fillRef>
+          <a:effectRef idx="2">
+            <a:schemeClr val="accent1"/>
+          </a:effectRef>
+          <a:fontRef idx="minor">
+            <a:schemeClr val="lt1"/>
+          </a:fontRef>
+        </p:style>
+        <p:txBody>
+          <a:bodyPr rtlCol="0" anchor="ctr"/>
+          <a:lstStyle/>
+          <a:p>
+            <a:pPr algn="ctr"/>
+          </a:p>
+        </p:txBody>
+      </p:sp>
+      <p:sp>
+        <p:nvSpPr>
+          <p:cNvPr id="11" name="Rounded Rectangle 10"/>
+          <p:cNvSpPr/>
+          <p:nvPr/>
+        </p:nvSpPr>
+        <p:spPr>
+          <a:xfrm>
+            <a:off x="3474720" y="1143000"/>
+            <a:ext cx="2286000" cy="292608"/>
+          </a:xfrm>
+          <a:prstGeom prst="roundRect">
+            <a:avLst/>
+          </a:prstGeom>
+          <a:solidFill>
+            <a:srgbClr val="F0F9FF"/>
+          </a:solidFill>
+          <a:ln w="12700">
+            <a:solidFill>
+              <a:srgbClr val="BAE6FD"/>
+            </a:solidFill>
+          </a:ln>
+        </p:spPr>
+        <p:style>
+          <a:lnRef idx="1">
+            <a:schemeClr val="accent1"/>
+          </a:lnRef>
+          <a:fillRef idx="3">
+            <a:schemeClr val="accent1"/>
+          </a:fillRef>
+          <a:effectRef idx="2">
+            <a:schemeClr val="accent1"/>
+          </a:effectRef>
+          <a:fontRef idx="minor">
+            <a:schemeClr val="lt1"/>
+          </a:fontRef>
+        </p:style>
+        <p:txBody>
+          <a:bodyPr rtlCol="0" anchor="ctr" wrap="none"/>
+          <a:lstStyle/>
+          <a:p>
+            <a:pPr algn="ctr">
+              <a:defRPr sz="1000" b="1">
+                <a:solidFill>
+                  <a:srgbClr val="0284C7"/>
+                </a:solidFill>
+              </a:defRPr>
+            </a:pPr>
+            <a:r>
+              <a:t>NDRF / SDRF TEAMS</a:t>
+            </a:r>
+          </a:p>
+        </p:txBody>
+      </p:sp>
+      <p:sp>
+        <p:nvSpPr>
+          <p:cNvPr id="12" name="TextBox 11"/>
+          <p:cNvSpPr txBox="1"/>
+          <p:nvPr/>
+        </p:nvSpPr>
+        <p:spPr>
+          <a:xfrm>
+            <a:off x="3474720" y="1600200"/>
+            <a:ext cx="2286000" cy="3063239"/>
+          </a:xfrm>
+          <a:prstGeom prst="rect">
+            <a:avLst/>
+          </a:prstGeom>
+          <a:noFill/>
+        </p:spPr>
+        <p:txBody>
+          <a:bodyPr wrap="square">
+            <a:spAutoFit/>
+          </a:bodyPr>
+          <a:lstStyle/>
           <a:p>
             <a:pPr>
-              <a:defRPr sz="1250">
+              <a:defRPr sz="1000">
                 <a:solidFill>
                   <a:srgbClr val="1E293B"/>
                 </a:solidFill>
               </a:defRPr>
             </a:pPr>
             <a:r>
-              <a:t>Current Commercial Standard (e.g. DJI Matrice 30T):</a:t>
-            </a:r>
-            <a:br/>
-            <a:r>
-              <a:t>• Unit Cost: ₹9,00,000 to ₹14,00,000 (Exorbitant for regional SDRF)</a:t>
-            </a:r>
-            <a:br/>
-            <a:r>
-              <a:t>• Closed Ecosystem: Locked firmware, foreign server telemetry risk.</a:t>
-            </a:r>
-            <a:br/>
-            <a:r>
-              <a:t>• No Custom Edge AI: Cannot deploy custom disaster hazard models.</a:t>
-            </a:r>
-            <a:br/>
-            <a:br/>
-            <a:r>
-              <a:t>Project Phoenix SAR Platform:</a:t>
-            </a:r>
-            <a:br/>
-            <a:r>
-              <a:t>• Estimated Unit Cost: ₹85,000 to ₹1,40,000 (1/8th of the cost!)</a:t>
-            </a:r>
-            <a:br/>
-            <a:r>
-              <a:t>• Open-Source Dual-Brain Stack: 100% Indian data sovereignty.</a:t>
-            </a:r>
-            <a:br/>
-            <a:r>
-              <a:t>• Edge Programmability: Deploy updated neural models over USB.</a:t>
-            </a:r>
-            <a:br/>
-            <a:r>
-              <a:t>• Rapid Deployment: &lt; 3 minutes from unboxing to takeoff.</a:t>
-            </a:r>
-            <a:br/>
-            <a:r>
-              <a:t>• Swarm Scalable: 1 disaster battalion can deploy 5 Phoenix units for the price of 1 proprietary enterprise drone.</a:t>
+              <a:t>• Advance hazard mapping</a:t>
+            </a:r>
+            <a:br/>
+            <a:r>
+              <a:t>• Avoid live cables &amp; gas leaks</a:t>
+            </a:r>
+            <a:br/>
+            <a:r>
+              <a:t>• Automated safe-route navigation</a:t>
+            </a:r>
+            <a:br/>
+            <a:r>
+              <a:t>• Reduced physical rescuer fatigue</a:t>
+            </a:r>
+          </a:p>
+        </p:txBody>
+      </p:sp>
+      <p:sp>
+        <p:nvSpPr>
+          <p:cNvPr id="13" name="Rounded Rectangle 12"/>
+          <p:cNvSpPr/>
+          <p:nvPr/>
+        </p:nvSpPr>
+        <p:spPr>
+          <a:xfrm>
+            <a:off x="6126479" y="1005840"/>
+            <a:ext cx="2560320" cy="3749039"/>
+          </a:xfrm>
+          <a:prstGeom prst="roundRect">
+            <a:avLst/>
+          </a:prstGeom>
+          <a:solidFill>
+            <a:srgbClr val="FFFFFF"/>
+          </a:solidFill>
+          <a:ln w="15240">
+            <a:solidFill>
+              <a:srgbClr val="DDD6FE"/>
+            </a:solidFill>
+          </a:ln>
+        </p:spPr>
+        <p:style>
+          <a:lnRef idx="1">
+            <a:schemeClr val="accent1"/>
+          </a:lnRef>
+          <a:fillRef idx="3">
+            <a:schemeClr val="accent1"/>
+          </a:fillRef>
+          <a:effectRef idx="2">
+            <a:schemeClr val="accent1"/>
+          </a:effectRef>
+          <a:fontRef idx="minor">
+            <a:schemeClr val="lt1"/>
+          </a:fontRef>
+        </p:style>
+        <p:txBody>
+          <a:bodyPr rtlCol="0" anchor="ctr"/>
+          <a:lstStyle/>
+          <a:p>
+            <a:pPr algn="ctr"/>
+          </a:p>
+        </p:txBody>
+      </p:sp>
+      <p:sp>
+        <p:nvSpPr>
+          <p:cNvPr id="14" name="Rounded Rectangle 13"/>
+          <p:cNvSpPr/>
+          <p:nvPr/>
+        </p:nvSpPr>
+        <p:spPr>
+          <a:xfrm>
+            <a:off x="6263639" y="1143000"/>
+            <a:ext cx="2286000" cy="292608"/>
+          </a:xfrm>
+          <a:prstGeom prst="roundRect">
+            <a:avLst/>
+          </a:prstGeom>
+          <a:solidFill>
+            <a:srgbClr val="F5F3FF"/>
+          </a:solidFill>
+          <a:ln w="12700">
+            <a:solidFill>
+              <a:srgbClr val="DDD6FE"/>
+            </a:solidFill>
+          </a:ln>
+        </p:spPr>
+        <p:style>
+          <a:lnRef idx="1">
+            <a:schemeClr val="accent1"/>
+          </a:lnRef>
+          <a:fillRef idx="3">
+            <a:schemeClr val="accent1"/>
+          </a:fillRef>
+          <a:effectRef idx="2">
+            <a:schemeClr val="accent1"/>
+          </a:effectRef>
+          <a:fontRef idx="minor">
+            <a:schemeClr val="lt1"/>
+          </a:fontRef>
+        </p:style>
+        <p:txBody>
+          <a:bodyPr rtlCol="0" anchor="ctr" wrap="none"/>
+          <a:lstStyle/>
+          <a:p>
+            <a:pPr algn="ctr">
+              <a:defRPr sz="1000" b="1">
+                <a:solidFill>
+                  <a:srgbClr val="7C3AED"/>
+                </a:solidFill>
+              </a:defRPr>
+            </a:pPr>
+            <a:r>
+              <a:t>DISASTER AUTHORITIES</a:t>
+            </a:r>
+          </a:p>
+        </p:txBody>
+      </p:sp>
+      <p:sp>
+        <p:nvSpPr>
+          <p:cNvPr id="15" name="TextBox 14"/>
+          <p:cNvSpPr txBox="1"/>
+          <p:nvPr/>
+        </p:nvSpPr>
+        <p:spPr>
+          <a:xfrm>
+            <a:off x="6263639" y="1600200"/>
+            <a:ext cx="2286000" cy="3063239"/>
+          </a:xfrm>
+          <a:prstGeom prst="rect">
+            <a:avLst/>
+          </a:prstGeom>
+          <a:noFill/>
+        </p:spPr>
+        <p:txBody>
+          <a:bodyPr wrap="square">
+            <a:spAutoFit/>
+          </a:bodyPr>
+          <a:lstStyle/>
+          <a:p>
+            <a:pPr>
+              <a:defRPr sz="1000">
+                <a:solidFill>
+                  <a:srgbClr val="1E293B"/>
+                </a:solidFill>
+              </a:defRPr>
+            </a:pPr>
+            <a:r>
+              <a:t>• Unified local tactical map</a:t>
+            </a:r>
+            <a:br/>
+            <a:r>
+              <a:t>• Real-time survivor count &amp; coords</a:t>
+            </a:r>
+            <a:br/>
+            <a:r>
+              <a:t>• Zero dependency on cell towers</a:t>
+            </a:r>
+            <a:br/>
+            <a:r>
+              <a:t>• Dynamic search sector logging</a:t>
+            </a:r>
+          </a:p>
+        </p:txBody>
+      </p:sp>
+      <p:sp>
+        <p:nvSpPr>
+          <p:cNvPr id="16" name="Rounded Rectangle 15"/>
+          <p:cNvSpPr/>
+          <p:nvPr/>
+        </p:nvSpPr>
+        <p:spPr>
+          <a:xfrm>
+            <a:off x="8915399" y="1005840"/>
+            <a:ext cx="2560320" cy="3749039"/>
+          </a:xfrm>
+          <a:prstGeom prst="roundRect">
+            <a:avLst/>
+          </a:prstGeom>
+          <a:solidFill>
+            <a:srgbClr val="FFFFFF"/>
+          </a:solidFill>
+          <a:ln w="15240">
+            <a:solidFill>
+              <a:srgbClr val="FDE68A"/>
+            </a:solidFill>
+          </a:ln>
+        </p:spPr>
+        <p:style>
+          <a:lnRef idx="1">
+            <a:schemeClr val="accent1"/>
+          </a:lnRef>
+          <a:fillRef idx="3">
+            <a:schemeClr val="accent1"/>
+          </a:fillRef>
+          <a:effectRef idx="2">
+            <a:schemeClr val="accent1"/>
+          </a:effectRef>
+          <a:fontRef idx="minor">
+            <a:schemeClr val="lt1"/>
+          </a:fontRef>
+        </p:style>
+        <p:txBody>
+          <a:bodyPr rtlCol="0" anchor="ctr"/>
+          <a:lstStyle/>
+          <a:p>
+            <a:pPr algn="ctr"/>
+          </a:p>
+        </p:txBody>
+      </p:sp>
+      <p:sp>
+        <p:nvSpPr>
+          <p:cNvPr id="17" name="Rounded Rectangle 16"/>
+          <p:cNvSpPr/>
+          <p:nvPr/>
+        </p:nvSpPr>
+        <p:spPr>
+          <a:xfrm>
+            <a:off x="9052559" y="1143000"/>
+            <a:ext cx="2286000" cy="292608"/>
+          </a:xfrm>
+          <a:prstGeom prst="roundRect">
+            <a:avLst/>
+          </a:prstGeom>
+          <a:solidFill>
+            <a:srgbClr val="FEF3C7"/>
+          </a:solidFill>
+          <a:ln w="12700">
+            <a:solidFill>
+              <a:srgbClr val="FDE68A"/>
+            </a:solidFill>
+          </a:ln>
+        </p:spPr>
+        <p:style>
+          <a:lnRef idx="1">
+            <a:schemeClr val="accent1"/>
+          </a:lnRef>
+          <a:fillRef idx="3">
+            <a:schemeClr val="accent1"/>
+          </a:fillRef>
+          <a:effectRef idx="2">
+            <a:schemeClr val="accent1"/>
+          </a:effectRef>
+          <a:fontRef idx="minor">
+            <a:schemeClr val="lt1"/>
+          </a:fontRef>
+        </p:style>
+        <p:txBody>
+          <a:bodyPr rtlCol="0" anchor="ctr" wrap="none"/>
+          <a:lstStyle/>
+          <a:p>
+            <a:pPr algn="ctr">
+              <a:defRPr sz="1000" b="1">
+                <a:solidFill>
+                  <a:srgbClr val="D97706"/>
+                </a:solidFill>
+              </a:defRPr>
+            </a:pPr>
+            <a:r>
+              <a:t>DISTRICT GOVERNANCE</a:t>
+            </a:r>
+          </a:p>
+        </p:txBody>
+      </p:sp>
+      <p:sp>
+        <p:nvSpPr>
+          <p:cNvPr id="18" name="TextBox 17"/>
+          <p:cNvSpPr txBox="1"/>
+          <p:nvPr/>
+        </p:nvSpPr>
+        <p:spPr>
+          <a:xfrm>
+            <a:off x="9052559" y="1600200"/>
+            <a:ext cx="2286000" cy="3063239"/>
+          </a:xfrm>
+          <a:prstGeom prst="rect">
+            <a:avLst/>
+          </a:prstGeom>
+          <a:noFill/>
+        </p:spPr>
+        <p:txBody>
+          <a:bodyPr wrap="square">
+            <a:spAutoFit/>
+          </a:bodyPr>
+          <a:lstStyle/>
+          <a:p>
+            <a:pPr>
+              <a:defRPr sz="1000">
+                <a:solidFill>
+                  <a:srgbClr val="1E293B"/>
+                </a:solidFill>
+              </a:defRPr>
+            </a:pPr>
+            <a:r>
+              <a:t>• Efficient resource allocation</a:t>
+            </a:r>
+            <a:br/>
+            <a:r>
+              <a:t>• Targeted airlift &amp; medical drops</a:t>
+            </a:r>
+            <a:br/>
+            <a:r>
+              <a:t>• Post-disaster audit trails</a:t>
+            </a:r>
+            <a:br/>
+            <a:r>
+              <a:t>• Affordable procurement at scale</a:t>
+            </a:r>
+          </a:p>
+        </p:txBody>
+      </p:sp>
+      <p:sp>
+        <p:nvSpPr>
+          <p:cNvPr id="19" name="Rounded Rectangle 18"/>
+          <p:cNvSpPr/>
+          <p:nvPr/>
+        </p:nvSpPr>
+        <p:spPr>
+          <a:xfrm>
+            <a:off x="548640" y="4937760"/>
+            <a:ext cx="11094415" cy="1371600"/>
+          </a:xfrm>
+          <a:prstGeom prst="roundRect">
+            <a:avLst/>
+          </a:prstGeom>
+          <a:solidFill>
+            <a:srgbClr val="FFFFFF"/>
+          </a:solidFill>
+          <a:ln w="15240">
+            <a:solidFill>
+              <a:srgbClr val="E2E8F0"/>
+            </a:solidFill>
+          </a:ln>
+        </p:spPr>
+        <p:style>
+          <a:lnRef idx="1">
+            <a:schemeClr val="accent1"/>
+          </a:lnRef>
+          <a:fillRef idx="3">
+            <a:schemeClr val="accent1"/>
+          </a:fillRef>
+          <a:effectRef idx="2">
+            <a:schemeClr val="accent1"/>
+          </a:effectRef>
+          <a:fontRef idx="minor">
+            <a:schemeClr val="lt1"/>
+          </a:fontRef>
+        </p:style>
+        <p:txBody>
+          <a:bodyPr rtlCol="0" anchor="ctr"/>
+          <a:lstStyle/>
+          <a:p>
+            <a:pPr algn="ctr"/>
+          </a:p>
+        </p:txBody>
+      </p:sp>
+      <p:sp>
+        <p:nvSpPr>
+          <p:cNvPr id="20" name="Rounded Rectangle 19"/>
+          <p:cNvSpPr/>
+          <p:nvPr/>
+        </p:nvSpPr>
+        <p:spPr>
+          <a:xfrm>
+            <a:off x="731520" y="5074920"/>
+            <a:ext cx="1645920" cy="256032"/>
+          </a:xfrm>
+          <a:prstGeom prst="roundRect">
+            <a:avLst/>
+          </a:prstGeom>
+          <a:solidFill>
+            <a:srgbClr val="F0F9FF"/>
+          </a:solidFill>
+          <a:ln w="12700">
+            <a:solidFill>
+              <a:srgbClr val="BAE6FD"/>
+            </a:solidFill>
+          </a:ln>
+        </p:spPr>
+        <p:style>
+          <a:lnRef idx="1">
+            <a:schemeClr val="accent1"/>
+          </a:lnRef>
+          <a:fillRef idx="3">
+            <a:schemeClr val="accent1"/>
+          </a:fillRef>
+          <a:effectRef idx="2">
+            <a:schemeClr val="accent1"/>
+          </a:effectRef>
+          <a:fontRef idx="minor">
+            <a:schemeClr val="lt1"/>
+          </a:fontRef>
+        </p:style>
+        <p:txBody>
+          <a:bodyPr rtlCol="0" anchor="ctr" wrap="none"/>
+          <a:lstStyle/>
+          <a:p>
+            <a:pPr algn="ctr">
+              <a:defRPr sz="1000" b="1">
+                <a:solidFill>
+                  <a:srgbClr val="0284C7"/>
+                </a:solidFill>
+              </a:defRPr>
+            </a:pPr>
+            <a:r>
+              <a:t>IMPACT PIPELINE</a:t>
+            </a:r>
+          </a:p>
+        </p:txBody>
+      </p:sp>
+      <p:sp>
+        <p:nvSpPr>
+          <p:cNvPr id="21" name="TextBox 20"/>
+          <p:cNvSpPr txBox="1"/>
+          <p:nvPr/>
+        </p:nvSpPr>
+        <p:spPr>
+          <a:xfrm>
+            <a:off x="731520" y="5394960"/>
+            <a:ext cx="10698480" cy="777240"/>
+          </a:xfrm>
+          <a:prstGeom prst="rect">
+            <a:avLst/>
+          </a:prstGeom>
+          <a:noFill/>
+        </p:spPr>
+        <p:txBody>
+          <a:bodyPr wrap="square">
+            <a:spAutoFit/>
+          </a:bodyPr>
+          <a:lstStyle/>
+          <a:p>
+            <a:pPr algn="ctr">
+              <a:defRPr sz="1100" b="1">
+                <a:solidFill>
+                  <a:srgbClr val="0D9488"/>
+                </a:solidFill>
+              </a:defRPr>
+            </a:pPr>
+            <a:r>
+              <a:t>RAPID UNBOXING (&lt;3 min)   ➔   AUTONOMOUS THERMAL SWEEP   ➔   EXACT GPS RAY-CASTING   ➔   ZERO-DROP LORA BEACON   ➔   MAXIMIZED LIVES SAVED</a:t>
             </a:r>
           </a:p>
         </p:txBody>
@@ -5101,75 +7370,23 @@
       <p:grpSpPr/>
       <p:sp>
         <p:nvSpPr>
-          <p:cNvPr id="2" name="TextBox 1"/>
-          <p:cNvSpPr txBox="1"/>
-          <p:nvPr/>
-        </p:nvSpPr>
-        <p:spPr>
-          <a:xfrm>
-            <a:off x="731520" y="365760"/>
-            <a:ext cx="10698480" cy="1005840"/>
+          <p:cNvPr id="2" name="Rectangle 1"/>
+          <p:cNvSpPr/>
+          <p:nvPr/>
+        </p:nvSpPr>
+        <p:spPr>
+          <a:xfrm>
+            <a:off x="0" y="0"/>
+            <a:ext cx="12191695" cy="6858000"/>
           </a:xfrm>
           <a:prstGeom prst="rect">
             <a:avLst/>
           </a:prstGeom>
-          <a:noFill/>
-        </p:spPr>
-        <p:txBody>
-          <a:bodyPr wrap="square" lIns="0" tIns="0" rIns="0" bIns="0">
-            <a:spAutoFit/>
-          </a:bodyPr>
-          <a:lstStyle/>
-          <a:p>
-            <a:pPr>
-              <a:spcAft>
-                <a:spcPts val="400"/>
-              </a:spcAft>
-              <a:defRPr sz="1000" b="1">
-                <a:solidFill>
-                  <a:srgbClr val="F59E0B"/>
-                </a:solidFill>
-              </a:defRPr>
-            </a:pPr>
-            <a:r>
-              <a:t>SMART INDIA HACKATHON 2026 | PROBLEM STATEMENT ID: SIH26177</a:t>
-            </a:r>
-          </a:p>
-          <a:p>
-            <a:pPr>
-              <a:defRPr sz="2200" b="1">
-                <a:solidFill>
-                  <a:srgbClr val="0F172A"/>
-                </a:solidFill>
-              </a:defRPr>
-            </a:pPr>
-            <a:r>
-              <a:t>Research Foundations &amp; Team Phoenix Competency</a:t>
-            </a:r>
-          </a:p>
-        </p:txBody>
-      </p:sp>
-      <p:sp>
-        <p:nvSpPr>
-          <p:cNvPr id="3" name="Rectangle 2"/>
-          <p:cNvSpPr/>
-          <p:nvPr/>
-        </p:nvSpPr>
-        <p:spPr>
-          <a:xfrm>
-            <a:off x="731520" y="1325880"/>
-            <a:ext cx="10698480" cy="36576"/>
-          </a:xfrm>
-          <a:prstGeom prst="rect">
-            <a:avLst/>
-          </a:prstGeom>
           <a:solidFill>
-            <a:srgbClr val="F59E0B"/>
+            <a:srgbClr val="F8FAFC"/>
           </a:solidFill>
           <a:ln>
-            <a:solidFill>
-              <a:srgbClr val="F59E0B"/>
-            </a:solidFill>
+            <a:noFill/>
           </a:ln>
         </p:spPr>
         <p:style>
@@ -5196,14 +7413,14 @@
       </p:sp>
       <p:sp>
         <p:nvSpPr>
-          <p:cNvPr id="4" name="Rounded Rectangle 3"/>
+          <p:cNvPr id="3" name="Rounded Rectangle 2"/>
           <p:cNvSpPr/>
           <p:nvPr/>
         </p:nvSpPr>
         <p:spPr>
           <a:xfrm>
-            <a:off x="731520" y="1554480"/>
-            <a:ext cx="5166360" cy="4754880"/>
+            <a:off x="548640" y="320040"/>
+            <a:ext cx="1645920" cy="502920"/>
           </a:xfrm>
           <a:prstGeom prst="roundRect">
             <a:avLst/>
@@ -5211,7 +7428,7 @@
           <a:solidFill>
             <a:srgbClr val="FFFFFF"/>
           </a:solidFill>
-          <a:ln w="19050">
+          <a:ln w="12700">
             <a:solidFill>
               <a:srgbClr val="E2E8F0"/>
             </a:solidFill>
@@ -5235,20 +7452,29 @@
           <a:bodyPr rtlCol="0" anchor="ctr"/>
           <a:lstStyle/>
           <a:p>
-            <a:pPr algn="ctr"/>
-          </a:p>
-        </p:txBody>
-      </p:sp>
-      <p:sp>
-        <p:nvSpPr>
-          <p:cNvPr id="5" name="TextBox 4"/>
+            <a:pPr algn="ctr">
+              <a:defRPr sz="1300" b="1">
+                <a:solidFill>
+                  <a:srgbClr val="0F172A"/>
+                </a:solidFill>
+              </a:defRPr>
+            </a:pPr>
+            <a:r>
+              <a:t>PHOENIX</a:t>
+            </a:r>
+          </a:p>
+        </p:txBody>
+      </p:sp>
+      <p:sp>
+        <p:nvSpPr>
+          <p:cNvPr id="4" name="TextBox 3"/>
           <p:cNvSpPr txBox="1"/>
           <p:nvPr/>
         </p:nvSpPr>
         <p:spPr>
           <a:xfrm>
-            <a:off x="914400" y="1737360"/>
-            <a:ext cx="4800600" cy="4389120"/>
+            <a:off x="2377440" y="292608"/>
+            <a:ext cx="7315200" cy="594360"/>
           </a:xfrm>
           <a:prstGeom prst="rect">
             <a:avLst/>
@@ -5261,81 +7487,77 @@
           </a:bodyPr>
           <a:lstStyle/>
           <a:p>
-            <a:pPr>
-              <a:spcAft>
-                <a:spcPts val="800"/>
-              </a:spcAft>
-              <a:defRPr sz="1600" b="1">
+            <a:pPr algn="ctr">
+              <a:defRPr sz="2000" b="1">
                 <a:solidFill>
                   <a:srgbClr val="0F172A"/>
                 </a:solidFill>
               </a:defRPr>
             </a:pPr>
             <a:r>
-              <a:t>Research Foundations &amp; Prior Art</a:t>
-            </a:r>
-          </a:p>
-          <a:p>
-            <a:pPr>
-              <a:defRPr sz="1250">
-                <a:solidFill>
-                  <a:srgbClr val="1E293B"/>
-                </a:solidFill>
-              </a:defRPr>
-            </a:pPr>
-            <a:r>
-              <a:t>1. Dr. Samir Bouabdallah (EPFL Thesis No. 3727, 2007):</a:t>
-            </a:r>
-            <a:br/>
-            <a:r>
-              <a:t>   • 'Design and Control of Quadrotors with Application to Autonomous Flying'</a:t>
-            </a:r>
-            <a:br/>
-            <a:r>
-              <a:t>   • Grounded our 12-state rigid body dynamics, spectral loop separation, and the 90/10 electrical power sizing law.</a:t>
-            </a:r>
-            <a:br/>
-            <a:br/>
-            <a:r>
-              <a:t>2. NASA Technical Memorandum 4741 (NASA Langley, 1996):</a:t>
-            </a:r>
-            <a:br/>
-            <a:r>
-              <a:t>   • Informed selection of zero-pitching-moment (Cm=0) reflexed airfoils to eliminate blade flutter and IMU vibration.</a:t>
-            </a:r>
-            <a:br/>
-            <a:br/>
-            <a:r>
-              <a:t>3. JRFCQAI Open-Source Dual-Brain Architecture (Ravi Butani, 2024):</a:t>
-            </a:r>
-            <a:br/>
-            <a:r>
-              <a:t>   • Established the viability of Zephyr RTOS (STM32U5) + Debian Linux (Qualcomm QRB2210) on the Arduino UNO Q for UAV flight.</a:t>
-            </a:r>
-          </a:p>
-        </p:txBody>
-      </p:sp>
-      <p:sp>
-        <p:nvSpPr>
-          <p:cNvPr id="6" name="Rounded Rectangle 5"/>
+              <a:t>Academic Research Foundations &amp; Prototype Verification</a:t>
+            </a:r>
+          </a:p>
+        </p:txBody>
+      </p:sp>
+      <p:sp>
+        <p:nvSpPr>
+          <p:cNvPr id="5" name="TextBox 4"/>
+          <p:cNvSpPr txBox="1"/>
+          <p:nvPr/>
+        </p:nvSpPr>
+        <p:spPr>
+          <a:xfrm>
+            <a:off x="9875520" y="274320"/>
+            <a:ext cx="1828800" cy="594360"/>
+          </a:xfrm>
+          <a:prstGeom prst="rect">
+            <a:avLst/>
+          </a:prstGeom>
+          <a:noFill/>
+        </p:spPr>
+        <p:txBody>
+          <a:bodyPr wrap="none">
+            <a:spAutoFit/>
+          </a:bodyPr>
+          <a:lstStyle/>
+          <a:p>
+            <a:pPr algn="r">
+              <a:defRPr sz="950" b="1">
+                <a:solidFill>
+                  <a:srgbClr val="0F172A"/>
+                </a:solidFill>
+              </a:defRPr>
+            </a:pPr>
+            <a:r>
+              <a:t>SMART INDIA</a:t>
+            </a:r>
+            <a:br/>
+            <a:r>
+              <a:t>HACKATHON 2026</a:t>
+            </a:r>
+          </a:p>
+        </p:txBody>
+      </p:sp>
+      <p:sp>
+        <p:nvSpPr>
+          <p:cNvPr id="6" name="Rectangle 5"/>
           <p:cNvSpPr/>
           <p:nvPr/>
         </p:nvSpPr>
         <p:spPr>
           <a:xfrm>
-            <a:off x="6263640" y="1554480"/>
-            <a:ext cx="5166360" cy="4754880"/>
-          </a:xfrm>
-          <a:prstGeom prst="roundRect">
+            <a:off x="0" y="6537960"/>
+            <a:ext cx="12191695" cy="320040"/>
+          </a:xfrm>
+          <a:prstGeom prst="rect">
             <a:avLst/>
           </a:prstGeom>
           <a:solidFill>
-            <a:srgbClr val="FFFFFF"/>
+            <a:srgbClr val="0F172A"/>
           </a:solidFill>
-          <a:ln w="19050">
-            <a:solidFill>
-              <a:srgbClr val="E2E8F0"/>
-            </a:solidFill>
+          <a:ln>
+            <a:noFill/>
           </a:ln>
         </p:spPr>
         <p:style>
@@ -5356,20 +7578,128 @@
           <a:bodyPr rtlCol="0" anchor="ctr"/>
           <a:lstStyle/>
           <a:p>
+            <a:pPr algn="ctr">
+              <a:defRPr sz="900">
+                <a:solidFill>
+                  <a:srgbClr val="FFFFFF"/>
+                </a:solidFill>
+              </a:defRPr>
+            </a:pPr>
+            <a:r>
+              <a:t>PROJECT PHOENIX: Autonomous Multi-Spectral Edge-AI UAV  |  SIH26177 (Qualcomm Inc.)                                                                   Slide 6</a:t>
+            </a:r>
+          </a:p>
+        </p:txBody>
+      </p:sp>
+      <p:sp>
+        <p:nvSpPr>
+          <p:cNvPr id="7" name="Rounded Rectangle 6"/>
+          <p:cNvSpPr/>
+          <p:nvPr/>
+        </p:nvSpPr>
+        <p:spPr>
+          <a:xfrm>
+            <a:off x="548640" y="1005840"/>
+            <a:ext cx="5486400" cy="5394960"/>
+          </a:xfrm>
+          <a:prstGeom prst="roundRect">
+            <a:avLst/>
+          </a:prstGeom>
+          <a:solidFill>
+            <a:srgbClr val="FFFFFF"/>
+          </a:solidFill>
+          <a:ln w="15240">
+            <a:solidFill>
+              <a:srgbClr val="E2E8F0"/>
+            </a:solidFill>
+          </a:ln>
+        </p:spPr>
+        <p:style>
+          <a:lnRef idx="1">
+            <a:schemeClr val="accent1"/>
+          </a:lnRef>
+          <a:fillRef idx="3">
+            <a:schemeClr val="accent1"/>
+          </a:fillRef>
+          <a:effectRef idx="2">
+            <a:schemeClr val="accent1"/>
+          </a:effectRef>
+          <a:fontRef idx="minor">
+            <a:schemeClr val="lt1"/>
+          </a:fontRef>
+        </p:style>
+        <p:txBody>
+          <a:bodyPr rtlCol="0" anchor="ctr"/>
+          <a:lstStyle/>
+          <a:p>
             <a:pPr algn="ctr"/>
           </a:p>
         </p:txBody>
       </p:sp>
       <p:sp>
         <p:nvSpPr>
-          <p:cNvPr id="7" name="TextBox 6"/>
+          <p:cNvPr id="8" name="Rounded Rectangle 7"/>
+          <p:cNvSpPr/>
+          <p:nvPr/>
+        </p:nvSpPr>
+        <p:spPr>
+          <a:xfrm>
+            <a:off x="731520" y="1143000"/>
+            <a:ext cx="2011680" cy="292608"/>
+          </a:xfrm>
+          <a:prstGeom prst="roundRect">
+            <a:avLst/>
+          </a:prstGeom>
+          <a:solidFill>
+            <a:srgbClr val="F0F9FF"/>
+          </a:solidFill>
+          <a:ln w="12700">
+            <a:solidFill>
+              <a:srgbClr val="BAE6FD"/>
+            </a:solidFill>
+          </a:ln>
+        </p:spPr>
+        <p:style>
+          <a:lnRef idx="1">
+            <a:schemeClr val="accent1"/>
+          </a:lnRef>
+          <a:fillRef idx="3">
+            <a:schemeClr val="accent1"/>
+          </a:fillRef>
+          <a:effectRef idx="2">
+            <a:schemeClr val="accent1"/>
+          </a:effectRef>
+          <a:fontRef idx="minor">
+            <a:schemeClr val="lt1"/>
+          </a:fontRef>
+        </p:style>
+        <p:txBody>
+          <a:bodyPr rtlCol="0" anchor="ctr" wrap="none"/>
+          <a:lstStyle/>
+          <a:p>
+            <a:pPr algn="ctr">
+              <a:defRPr sz="1000" b="1">
+                <a:solidFill>
+                  <a:srgbClr val="0284C7"/>
+                </a:solidFill>
+              </a:defRPr>
+            </a:pPr>
+            <a:r>
+              <a:t>RESEARCH &amp; REFERENCES</a:t>
+            </a:r>
+          </a:p>
+        </p:txBody>
+      </p:sp>
+      <p:sp>
+        <p:nvSpPr>
+          <p:cNvPr id="9" name="TextBox 8"/>
           <p:cNvSpPr txBox="1"/>
           <p:nvPr/>
         </p:nvSpPr>
         <p:spPr>
           <a:xfrm>
-            <a:off x="6446520" y="1737360"/>
-            <a:ext cx="4800600" cy="4389120"/>
+            <a:off x="731520" y="1508760"/>
+            <a:ext cx="5120640" cy="4663440"/>
           </a:xfrm>
           <a:prstGeom prst="rect">
             <a:avLst/>
@@ -5384,67 +7714,300 @@
           <a:p>
             <a:pPr>
               <a:spcAft>
-                <a:spcPts val="800"/>
+                <a:spcPts val="400"/>
               </a:spcAft>
-              <a:defRPr sz="1600" b="1">
-                <a:solidFill>
-                  <a:srgbClr val="F59E0B"/>
-                </a:solidFill>
-              </a:defRPr>
-            </a:pPr>
-            <a:r>
-              <a:t>Team Phoenix Synergy &amp; Execution Plan</a:t>
+            </a:pPr>
+            <a:r>
+              <a:rPr b="1" sz="1000">
+                <a:solidFill>
+                  <a:srgbClr val="0F172A"/>
+                </a:solidFill>
+              </a:rPr>
+              <a:t>1. Dr. Samir Bouabdallah (EPFL Thesis 3727, 2007)
+</a:t>
+            </a:r>
+            <a:r>
+              <a:rPr sz="850">
+                <a:solidFill>
+                  <a:srgbClr val="1E293B"/>
+                </a:solidFill>
+              </a:rPr>
+              <a:t>• 'Design and Control of Quadrotors with Application to Autonomous Flying'
+• Sourced 12-state rigid-body dynamics, 90/10 electrical power rule, and anti-windup integrator.
+</a:t>
             </a:r>
           </a:p>
           <a:p>
             <a:pPr>
-              <a:defRPr sz="1250">
+              <a:spcAft>
+                <a:spcPts val="400"/>
+              </a:spcAft>
+            </a:pPr>
+            <a:r>
+              <a:rPr b="1" sz="1000">
+                <a:solidFill>
+                  <a:srgbClr val="0F172A"/>
+                </a:solidFill>
+              </a:rPr>
+              <a:t>2. Souli, Karatzia, Kolios, Ellinas (Elsevier, 2024)
+</a:t>
+            </a:r>
+            <a:r>
+              <a:rPr sz="850">
                 <a:solidFill>
                   <a:srgbClr val="1E293B"/>
                 </a:solidFill>
-              </a:defRPr>
-            </a:pPr>
-            <a:r>
-              <a:t>• AI &amp; Data Science (AD):</a:t>
-            </a:r>
-            <a:br/>
-            <a:r>
-              <a:t>  - Multi-spectral RGB + Thermal dataset curation &amp; augmentation.</a:t>
-            </a:r>
-            <a:br/>
-            <a:r>
-              <a:t>  - INT8 model quantization for the Qualcomm Dragonwing NPU.</a:t>
-            </a:r>
-            <a:br/>
-            <a:br/>
-            <a:r>
-              <a:t>• Computer Science &amp; Engineering (CSE):</a:t>
-            </a:r>
-            <a:br/>
-            <a:r>
-              <a:t>  - Tait-Bryan Ray-Casting coordinate projection engine.</a:t>
-            </a:r>
-            <a:br/>
-            <a:r>
-              <a:t>  - Offline Web Ground Station (React + Leaflet + WebSocket bus).</a:t>
-            </a:r>
-            <a:br/>
-            <a:br/>
-            <a:r>
-              <a:t>• Cyber Security (CY):</a:t>
-            </a:r>
-            <a:br/>
-            <a:r>
-              <a:t>  - Telemetry packet authentication &amp; anti-spoofing.</a:t>
-            </a:r>
-            <a:br/>
-            <a:r>
-              <a:t>  - LoRa emergency telemetry fallback protocol &amp; store-and-forward sync.</a:t>
-            </a:r>
-            <a:br/>
-            <a:br/>
-            <a:r>
-              <a:t>GitHub Repository: github.com/jvstin47/Phoenix-SIH26177-SAR-UAV</a:t>
+              </a:rPr>
+              <a:t>• 'Mission-critical UAV swarm coordination using integrated ROS-LoRa architecture' (Computer Communications, Vol. 225)
+• Sourced 17-byte binary bit-packing &amp; P2P LoRa telemetry.
+</a:t>
+            </a:r>
+          </a:p>
+          <a:p>
+            <a:pPr>
+              <a:spcAft>
+                <a:spcPts val="400"/>
+              </a:spcAft>
+            </a:pPr>
+            <a:r>
+              <a:rPr b="1" sz="1000">
+                <a:solidFill>
+                  <a:srgbClr val="0F172A"/>
+                </a:solidFill>
+              </a:rPr>
+              <a:t>3. NASA Technical Memorandum 4741 (NASA Langley, 1996)
+</a:t>
+            </a:r>
+            <a:r>
+              <a:rPr sz="850">
+                <a:solidFill>
+                  <a:srgbClr val="1E293B"/>
+                </a:solidFill>
+              </a:rPr>
+              <a:t>• 'Computer Program To Obtain Ordinates for NACA Airfoils'
+• Sourced zero-pitching-moment (Cm=0) reflexed airfoil theory to eliminate blade flutter and IMU noise.
+</a:t>
+            </a:r>
+          </a:p>
+          <a:p>
+            <a:pPr>
+              <a:spcAft>
+                <a:spcPts val="400"/>
+              </a:spcAft>
+            </a:pPr>
+            <a:r>
+              <a:rPr b="1" sz="1000">
+                <a:solidFill>
+                  <a:srgbClr val="0F172A"/>
+                </a:solidFill>
+              </a:rPr>
+              <a:t>4. JRFCQAI Dual-Brain Platform (Ravi Butani, 2024)
+</a:t>
+            </a:r>
+            <a:r>
+              <a:rPr sz="850">
+                <a:solidFill>
+                  <a:srgbClr val="1E293B"/>
+                </a:solidFill>
+              </a:rPr>
+              <a:t>• 'Dual-Brain Physical AI Flight Controller on Arduino UNO Q'
+• Established Zephyr RTOS + Debian Linux on Qualcomm QRB2210.
+</a:t>
+            </a:r>
+          </a:p>
+        </p:txBody>
+      </p:sp>
+      <p:sp>
+        <p:nvSpPr>
+          <p:cNvPr id="10" name="Rounded Rectangle 9"/>
+          <p:cNvSpPr/>
+          <p:nvPr/>
+        </p:nvSpPr>
+        <p:spPr>
+          <a:xfrm>
+            <a:off x="6309360" y="1005840"/>
+            <a:ext cx="5303520" cy="5394960"/>
+          </a:xfrm>
+          <a:prstGeom prst="roundRect">
+            <a:avLst/>
+          </a:prstGeom>
+          <a:solidFill>
+            <a:srgbClr val="FFFFFF"/>
+          </a:solidFill>
+          <a:ln w="15240">
+            <a:solidFill>
+              <a:srgbClr val="E2E8F0"/>
+            </a:solidFill>
+          </a:ln>
+        </p:spPr>
+        <p:style>
+          <a:lnRef idx="1">
+            <a:schemeClr val="accent1"/>
+          </a:lnRef>
+          <a:fillRef idx="3">
+            <a:schemeClr val="accent1"/>
+          </a:fillRef>
+          <a:effectRef idx="2">
+            <a:schemeClr val="accent1"/>
+          </a:effectRef>
+          <a:fontRef idx="minor">
+            <a:schemeClr val="lt1"/>
+          </a:fontRef>
+        </p:style>
+        <p:txBody>
+          <a:bodyPr rtlCol="0" anchor="ctr"/>
+          <a:lstStyle/>
+          <a:p>
+            <a:pPr algn="ctr"/>
+          </a:p>
+        </p:txBody>
+      </p:sp>
+      <p:sp>
+        <p:nvSpPr>
+          <p:cNvPr id="11" name="Rounded Rectangle 10"/>
+          <p:cNvSpPr/>
+          <p:nvPr/>
+        </p:nvSpPr>
+        <p:spPr>
+          <a:xfrm>
+            <a:off x="6492240" y="1143000"/>
+            <a:ext cx="1463040" cy="292608"/>
+          </a:xfrm>
+          <a:prstGeom prst="roundRect">
+            <a:avLst/>
+          </a:prstGeom>
+          <a:solidFill>
+            <a:srgbClr val="F0FDFA"/>
+          </a:solidFill>
+          <a:ln w="12700">
+            <a:solidFill>
+              <a:srgbClr val="99F6E4"/>
+            </a:solidFill>
+          </a:ln>
+        </p:spPr>
+        <p:style>
+          <a:lnRef idx="1">
+            <a:schemeClr val="accent1"/>
+          </a:lnRef>
+          <a:fillRef idx="3">
+            <a:schemeClr val="accent1"/>
+          </a:fillRef>
+          <a:effectRef idx="2">
+            <a:schemeClr val="accent1"/>
+          </a:effectRef>
+          <a:fontRef idx="minor">
+            <a:schemeClr val="lt1"/>
+          </a:fontRef>
+        </p:style>
+        <p:txBody>
+          <a:bodyPr rtlCol="0" anchor="ctr" wrap="none"/>
+          <a:lstStyle/>
+          <a:p>
+            <a:pPr algn="ctr">
+              <a:defRPr sz="1000" b="1">
+                <a:solidFill>
+                  <a:srgbClr val="0D9488"/>
+                </a:solidFill>
+              </a:defRPr>
+            </a:pPr>
+            <a:r>
+              <a:t>PROTOTYPE PROOF</a:t>
+            </a:r>
+          </a:p>
+        </p:txBody>
+      </p:sp>
+      <p:sp>
+        <p:nvSpPr>
+          <p:cNvPr id="12" name="TextBox 11"/>
+          <p:cNvSpPr txBox="1"/>
+          <p:nvPr/>
+        </p:nvSpPr>
+        <p:spPr>
+          <a:xfrm>
+            <a:off x="6492240" y="1508760"/>
+            <a:ext cx="4937760" cy="4663440"/>
+          </a:xfrm>
+          <a:prstGeom prst="rect">
+            <a:avLst/>
+          </a:prstGeom>
+          <a:noFill/>
+        </p:spPr>
+        <p:txBody>
+          <a:bodyPr wrap="square">
+            <a:spAutoFit/>
+          </a:bodyPr>
+          <a:lstStyle/>
+          <a:p>
+            <a:pPr>
+              <a:spcAft>
+                <a:spcPts val="600"/>
+              </a:spcAft>
+              <a:defRPr sz="1100" b="1">
+                <a:solidFill>
+                  <a:srgbClr val="0F172A"/>
+                </a:solidFill>
+              </a:defRPr>
+            </a:pPr>
+            <a:r>
+              <a:t>OPEN-SOURCE REPOSITORY &amp; VERIFICATION ASSETS</a:t>
+            </a:r>
+          </a:p>
+          <a:p>
+            <a:pPr>
+              <a:defRPr sz="950">
+                <a:solidFill>
+                  <a:srgbClr val="1E293B"/>
+                </a:solidFill>
+              </a:defRPr>
+            </a:pPr>
+            <a:r>
+              <a:t>• Official GitHub Repository:</a:t>
+            </a:r>
+            <a:br/>
+            <a:r>
+              <a:t>  https://github.com/jvstin47/Phoenix-SIH26177-SAR-UAV</a:t>
+            </a:r>
+            <a:br/>
+            <a:br/>
+            <a:r>
+              <a:t>• Documented Subsystems:</a:t>
+            </a:r>
+            <a:br/>
+            <a:r>
+              <a:t>  1. docs/bouabdallah_quadrotor_research_findings.md</a:t>
+            </a:r>
+            <a:br/>
+            <a:r>
+              <a:t>  2. docs/ros_lora_mission_critical_uav_swarm_research.md</a:t>
+            </a:r>
+            <a:br/>
+            <a:r>
+              <a:t>  3. docs/aerodynamic_airfoil_considerations.md</a:t>
+            </a:r>
+            <a:br/>
+            <a:r>
+              <a:t>  4. presentation/sih_presentation_outline.md</a:t>
+            </a:r>
+            <a:br/>
+            <a:br/>
+            <a:r>
+              <a:t>• Prototype Architecture Deliverables:</a:t>
+            </a:r>
+            <a:br/>
+            <a:r>
+              <a:t>  - Live Web GCS Tactical Dashboard (React + Leaflet)</a:t>
+            </a:r>
+            <a:br/>
+            <a:r>
+              <a:t>  - Multi-Spectral Dual Stream (RGB + LWIR Thermal HUD)</a:t>
+            </a:r>
+            <a:br/>
+            <a:r>
+              <a:t>  - LoRa 17-Byte Binary Bit-Packing Serialization Module</a:t>
+            </a:r>
+            <a:br/>
+            <a:r>
+              <a:t>  - Ray-Casting Geolocation Python Engine</a:t>
             </a:r>
           </a:p>
         </p:txBody>
